--- a/lecons/USA/Practical Geography/13_USA_PRA_QT03b_Measures_of_Dispersion.pptx
+++ b/lecons/USA/Practical Geography/13_USA_PRA_QT03b_Measures_of_Dispersion.pptx
@@ -3289,7 +3289,7 @@
           <a:p>
             <a:r>
               <a:rPr lang="en-US" dirty="0"/>
-              <a:t>Let us copy The Variance. The variance is calculated as follows. Copy the point on Formula on the left, then draw the diagram on the right: worked examples. Give it a title and label it clearly.</a:t>
+              <a:t>Let us copy The Variance. The variance is calculated as follows. Copy the point on Formula on the left, then draw the diagram on the right: the variance. Give it a title and label it clearly.</a:t>
             </a:r>
             <a:endParaRPr lang="en-US" dirty="0"/>
           </a:p>
@@ -3377,7 +3377,7 @@
           <a:p>
             <a:r>
               <a:rPr lang="en-US" dirty="0"/>
-              <a:t>We continue with The Variance. On this slide we have Steps. Write each point on a new line, with the key term first, and explain it in your own words when we revise. When you finish, we go to the next slide.</a:t>
+              <a:t>We continue with The Variance. Copy the point on Steps: write the key term first, then its explanation.</a:t>
             </a:r>
             <a:endParaRPr lang="en-US" dirty="0"/>
           </a:p>
@@ -3553,7 +3553,7 @@
           <a:p>
             <a:r>
               <a:rPr lang="en-US" dirty="0"/>
-              <a:t>We continue with The Variance. On this slide we have Example and Sample or population. Write each point on a new line, with the key term first, and explain it in your own words when we revise.</a:t>
+              <a:t>We continue with The Variance. Copy the point on Example: write the key term first, then its explanation.</a:t>
             </a:r>
             <a:endParaRPr lang="en-US" dirty="0"/>
           </a:p>
@@ -3641,7 +3641,7 @@
           <a:p>
             <a:r>
               <a:rPr lang="en-US" dirty="0"/>
-              <a:t>Let us copy The Standard Deviation. The standard deviation is calculated and interpreted as follows. Copy the point on Formula on the left, then draw the diagram on the right: a standard deviation table. Give it a title and label it clearly.</a:t>
+              <a:t>We continue with The Variance. Copy the point on Sample or population: write the key term first, then its explanation.</a:t>
             </a:r>
             <a:endParaRPr lang="en-US" dirty="0"/>
           </a:p>
@@ -3729,7 +3729,7 @@
           <a:p>
             <a:r>
               <a:rPr lang="en-US" dirty="0"/>
-              <a:t>Copy the point on Example 1 on the left, then draw the diagram on the right: household ages. Give it a title and label it clearly.</a:t>
+              <a:t>Let us copy The Standard Deviation. The standard deviation is calculated and interpreted as follows. Copy the point on Formula on the left, then draw the diagram on the right: the standard deviation. Give it a title and label it clearly.</a:t>
             </a:r>
             <a:endParaRPr lang="en-US" dirty="0"/>
           </a:p>
@@ -3817,7 +3817,7 @@
           <a:p>
             <a:r>
               <a:rPr lang="en-US" dirty="0"/>
-              <a:t>We continue with The Standard Deviation. On this slide we have Example 2 and Interpretation. Write each point on a new line, with the key term first, and explain it in your own words when we revise. When you finish, we go to the next slide.</a:t>
+              <a:t>Copy the point on Example 1 on the left, then draw the diagram on the right: a worked example. Give it a title and label it clearly.</a:t>
             </a:r>
             <a:endParaRPr lang="en-US" dirty="0"/>
           </a:p>
@@ -3905,7 +3905,7 @@
           <a:p>
             <a:r>
               <a:rPr lang="en-US" dirty="0"/>
-              <a:t>We continue with The Standard Deviation. On this slide we have Advantage. Write each point on a new line, with the key term first, and explain it in your own words when we revise.</a:t>
+              <a:t>We continue with The Standard Deviation. Copy the point on Example 2: write the key term first, then its explanation.</a:t>
             </a:r>
             <a:endParaRPr lang="en-US" dirty="0"/>
           </a:p>
@@ -3993,7 +3993,7 @@
           <a:p>
             <a:r>
               <a:rPr lang="en-US" dirty="0"/>
-              <a:t>Let us copy The Coefficient of Variation. The coefficient of variation is calculated and interpreted as follows. Copy the point on Formula on the left, then draw the diagram on the right: the coefficient of variation. Give it a title and label it clearly.</a:t>
+              <a:t>We continue with The Standard Deviation. Copy the point on Interpretation: write the key term first, then its explanation.</a:t>
             </a:r>
             <a:endParaRPr lang="en-US" dirty="0"/>
           </a:p>
@@ -4081,7 +4081,7 @@
           <a:p>
             <a:r>
               <a:rPr lang="en-US" dirty="0"/>
-              <a:t>We continue with The Coefficient of Variation. On this slide we have Example. Write each point on a new line, with the key term first, and explain it in your own words when we revise.</a:t>
+              <a:t>Let us copy The Coefficient of Variation. The coefficient of variation is calculated and interpreted as follows. Copy the point on Formula and example on the left, then draw the diagram on the right: the coefficient of variation. Give it a title and label it clearly.</a:t>
             </a:r>
             <a:endParaRPr lang="en-US" dirty="0"/>
           </a:p>
@@ -4257,7 +4257,7 @@
           <a:p>
             <a:r>
               <a:rPr lang="en-US" dirty="0"/>
-              <a:t>We continue with The Coefficient of Variation. On this slide we have Use. Write each point on a new line, with the key term first, and explain it in your own words when we revise.</a:t>
+              <a:t>We continue with The Coefficient of Variation. Copy the point on Use: write the key term first, then its explanation.</a:t>
             </a:r>
             <a:endParaRPr lang="en-US" dirty="0"/>
           </a:p>
@@ -15085,7 +15085,7 @@
         <p:spPr>
           <a:xfrm>
             <a:off x="365760" y="1783080"/>
-            <a:ext cx="4846320" cy="4617720"/>
+            <a:ext cx="6035040" cy="4617720"/>
           </a:xfrm>
           <a:prstGeom prst="rect">
             <a:avLst/>
@@ -15149,7 +15149,7 @@
                 <a:ea typeface="Times New Roman" pitchFamily="34" charset="-122"/>
                 <a:cs typeface="Times New Roman" pitchFamily="34" charset="-120"/>
               </a:rPr>
-              <a:t>Variance = Σ(x − x̄)² ÷ n.</a:t>
+              <a:t>Variance = Σ(x − x̄)² ÷ n. It measures the average squared distance of the values from the mean.</a:t>
             </a:r>
             <a:endParaRPr lang="en-US" sz="3600" dirty="0"/>
           </a:p>
@@ -15171,8 +15171,8 @@
         </p:blipFill>
         <p:spPr>
           <a:xfrm>
-            <a:off x="5349240" y="2617506"/>
-            <a:ext cx="6659575" cy="2601397"/>
+            <a:off x="6537960" y="2849678"/>
+            <a:ext cx="5470855" cy="2137053"/>
           </a:xfrm>
           <a:prstGeom prst="rect">
             <a:avLst/>
@@ -15187,8 +15187,8 @@
         </p:nvSpPr>
         <p:spPr>
           <a:xfrm>
-            <a:off x="5349240" y="6089904"/>
-            <a:ext cx="6659575" cy="347472"/>
+            <a:off x="6537960" y="6089904"/>
+            <a:ext cx="5470855" cy="347472"/>
           </a:xfrm>
           <a:prstGeom prst="rect">
             <a:avLst/>
@@ -15212,7 +15212,7 @@
                 <a:ea typeface="Times New Roman" pitchFamily="34" charset="-122"/>
                 <a:cs typeface="Times New Roman" pitchFamily="34" charset="-120"/>
               </a:rPr>
-              <a:t>Illustration: worked examples</a:t>
+              <a:t>Illustration: the variance</a:t>
             </a:r>
             <a:endParaRPr lang="en-US" sz="1600" dirty="0"/>
           </a:p>
@@ -15347,7 +15347,7 @@
         <p:spPr>
           <a:xfrm>
             <a:off x="0" y="658368"/>
-            <a:ext cx="3840480" cy="5833872"/>
+            <a:ext cx="5120640" cy="5833872"/>
           </a:xfrm>
           <a:prstGeom prst="rect">
             <a:avLst/>
@@ -15362,8 +15362,8 @@
         </p:nvSpPr>
         <p:spPr>
           <a:xfrm>
-            <a:off x="4069080" y="1005840"/>
-            <a:ext cx="7802575" cy="731520"/>
+            <a:off x="5349240" y="1005840"/>
+            <a:ext cx="6522415" cy="731520"/>
           </a:xfrm>
           <a:prstGeom prst="rect">
             <a:avLst/>
@@ -15403,8 +15403,8 @@
         </p:nvSpPr>
         <p:spPr>
           <a:xfrm>
-            <a:off x="4069080" y="1783080"/>
-            <a:ext cx="7802575" cy="4663440"/>
+            <a:off x="5349240" y="1783080"/>
+            <a:ext cx="6522415" cy="4663440"/>
           </a:xfrm>
           <a:prstGeom prst="rect">
             <a:avLst/>
@@ -15431,17 +15431,13 @@
                 <a:ea typeface="Times New Roman" pitchFamily="34" charset="-122"/>
                 <a:cs typeface="Times New Roman" pitchFamily="34" charset="-120"/>
               </a:rPr>
-              <a:t>Steps:</a:t>
-            </a:r>
-            <a:endParaRPr lang="en-US" sz="4000" dirty="0"/>
-          </a:p>
-          <a:p>
-            <a:pPr algn="l" marL="342900" indent="-342900">
+              <a:t>Steps: </a:t>
+            </a:r>
+            <a:pPr algn="l" indent="0" marL="0">
               <a:spcAft>
                 <a:spcPts val="800"/>
               </a:spcAft>
-              <a:buSzPct val="100000"/>
-              <a:buChar char="•"/>
+              <a:buNone/>
             </a:pPr>
             <a:r>
               <a:rPr lang="en-US" sz="4000" dirty="0">
@@ -15452,70 +15448,7 @@
                 <a:ea typeface="Times New Roman" pitchFamily="34" charset="-122"/>
                 <a:cs typeface="Times New Roman" pitchFamily="34" charset="-120"/>
               </a:rPr>
-              <a:t>Calculate the mean.</a:t>
-            </a:r>
-            <a:endParaRPr lang="en-US" sz="4000" dirty="0"/>
-          </a:p>
-          <a:p>
-            <a:pPr algn="l" marL="342900" indent="-342900">
-              <a:spcAft>
-                <a:spcPts val="800"/>
-              </a:spcAft>
-              <a:buSzPct val="100000"/>
-              <a:buChar char="•"/>
-            </a:pPr>
-            <a:r>
-              <a:rPr lang="en-US" sz="4000" dirty="0">
-                <a:solidFill>
-                  <a:srgbClr val="111111"/>
-                </a:solidFill>
-                <a:latin typeface="Times New Roman" pitchFamily="34" charset="0"/>
-                <a:ea typeface="Times New Roman" pitchFamily="34" charset="-122"/>
-                <a:cs typeface="Times New Roman" pitchFamily="34" charset="-120"/>
-              </a:rPr>
-              <a:t>Subtract the mean from each value.</a:t>
-            </a:r>
-            <a:endParaRPr lang="en-US" sz="4000" dirty="0"/>
-          </a:p>
-          <a:p>
-            <a:pPr algn="l" marL="342900" indent="-342900">
-              <a:spcAft>
-                <a:spcPts val="800"/>
-              </a:spcAft>
-              <a:buSzPct val="100000"/>
-              <a:buChar char="•"/>
-            </a:pPr>
-            <a:r>
-              <a:rPr lang="en-US" sz="4000" dirty="0">
-                <a:solidFill>
-                  <a:srgbClr val="111111"/>
-                </a:solidFill>
-                <a:latin typeface="Times New Roman" pitchFamily="34" charset="0"/>
-                <a:ea typeface="Times New Roman" pitchFamily="34" charset="-122"/>
-                <a:cs typeface="Times New Roman" pitchFamily="34" charset="-120"/>
-              </a:rPr>
-              <a:t>Square each deviation.</a:t>
-            </a:r>
-            <a:endParaRPr lang="en-US" sz="4000" dirty="0"/>
-          </a:p>
-          <a:p>
-            <a:pPr algn="l" marL="342900" indent="-342900">
-              <a:spcAft>
-                <a:spcPts val="800"/>
-              </a:spcAft>
-              <a:buSzPct val="100000"/>
-              <a:buChar char="•"/>
-            </a:pPr>
-            <a:r>
-              <a:rPr lang="en-US" sz="4000" dirty="0">
-                <a:solidFill>
-                  <a:srgbClr val="111111"/>
-                </a:solidFill>
-                <a:latin typeface="Times New Roman" pitchFamily="34" charset="0"/>
-                <a:ea typeface="Times New Roman" pitchFamily="34" charset="-122"/>
-                <a:cs typeface="Times New Roman" pitchFamily="34" charset="-120"/>
-              </a:rPr>
-              <a:t>Add the squares and divide by n.</a:t>
+              <a:t>Calculate the mean, then subtract it from each value to find the deviations. Square each deviation, add the squares and divide by n.</a:t>
             </a:r>
             <a:endParaRPr lang="en-US" sz="4000" dirty="0"/>
           </a:p>
@@ -15889,7 +15822,7 @@
         <p:spPr>
           <a:xfrm>
             <a:off x="0" y="658368"/>
-            <a:ext cx="2468880" cy="5833872"/>
+            <a:ext cx="5120640" cy="5833872"/>
           </a:xfrm>
           <a:prstGeom prst="rect">
             <a:avLst/>
@@ -15904,8 +15837,8 @@
         </p:nvSpPr>
         <p:spPr>
           <a:xfrm>
-            <a:off x="2697480" y="1005840"/>
-            <a:ext cx="9174175" cy="731520"/>
+            <a:off x="5349240" y="1005840"/>
+            <a:ext cx="6522415" cy="731520"/>
           </a:xfrm>
           <a:prstGeom prst="rect">
             <a:avLst/>
@@ -15931,7 +15864,7 @@
                 <a:ea typeface="Times New Roman" pitchFamily="34" charset="-122"/>
                 <a:cs typeface="Times New Roman" pitchFamily="34" charset="-120"/>
               </a:rPr>
-              <a:t>1. The Variance (continued)</a:t>
+              <a:t>1. The Variance</a:t>
             </a:r>
             <a:endParaRPr lang="en-US" sz="3600" dirty="0"/>
           </a:p>
@@ -15945,8 +15878,8 @@
         </p:nvSpPr>
         <p:spPr>
           <a:xfrm>
-            <a:off x="2697480" y="1783080"/>
-            <a:ext cx="9174175" cy="4663440"/>
+            <a:off x="5349240" y="1783080"/>
+            <a:ext cx="6522415" cy="4663440"/>
           </a:xfrm>
           <a:prstGeom prst="rect">
             <a:avLst/>
@@ -15990,44 +15923,7 @@
                 <a:ea typeface="Times New Roman" pitchFamily="34" charset="-122"/>
                 <a:cs typeface="Times New Roman" pitchFamily="34" charset="-120"/>
               </a:rPr>
-              <a:t>Heights 610, 450, 160, 420, 310 mm: mean = 390, Σ(x − x̄)² = 112,200, variance = 112,200 ÷ 5 = 22,440 mm².</a:t>
-            </a:r>
-            <a:endParaRPr lang="en-US" sz="4000" dirty="0"/>
-          </a:p>
-          <a:p>
-            <a:pPr algn="l" indent="0" marL="0">
-              <a:spcAft>
-                <a:spcPts val="800"/>
-              </a:spcAft>
-              <a:buNone/>
-            </a:pPr>
-            <a:r>
-              <a:rPr lang="en-US" sz="4000" b="1" dirty="0">
-                <a:solidFill>
-                  <a:srgbClr val="111111"/>
-                </a:solidFill>
-                <a:latin typeface="Times New Roman" pitchFamily="34" charset="0"/>
-                <a:ea typeface="Times New Roman" pitchFamily="34" charset="-122"/>
-                <a:cs typeface="Times New Roman" pitchFamily="34" charset="-120"/>
-              </a:rPr>
-              <a:t>Sample or population: </a:t>
-            </a:r>
-            <a:pPr algn="l" indent="0" marL="0">
-              <a:spcAft>
-                <a:spcPts val="800"/>
-              </a:spcAft>
-              <a:buNone/>
-            </a:pPr>
-            <a:r>
-              <a:rPr lang="en-US" sz="4000" dirty="0">
-                <a:solidFill>
-                  <a:srgbClr val="111111"/>
-                </a:solidFill>
-                <a:latin typeface="Times New Roman" pitchFamily="34" charset="0"/>
-                <a:ea typeface="Times New Roman" pitchFamily="34" charset="-122"/>
-                <a:cs typeface="Times New Roman" pitchFamily="34" charset="-120"/>
-              </a:rPr>
-              <a:t>For a sample, statisticians divide by n − 1; for most GCE data treated as a whole set, we divide by n.</a:t>
+              <a:t>For heights of 610, 450, 160, 420 and 310 mm, the mean is 390 and Σ(x − x̄)² = 112,200. The variance is 112,200 ÷ 5 = 22,440 mm².</a:t>
             </a:r>
             <a:endParaRPr lang="en-US" sz="4000" dirty="0"/>
           </a:p>
@@ -16145,129 +16041,9 @@
           </a:p>
         </p:txBody>
       </p:sp>
-      <p:sp>
-        <p:nvSpPr>
-          <p:cNvPr id="3" name="Text 1"/>
-          <p:cNvSpPr/>
-          <p:nvPr/>
-        </p:nvSpPr>
-        <p:spPr>
-          <a:xfrm>
-            <a:off x="365760" y="1005840"/>
-            <a:ext cx="11460175" cy="731520"/>
-          </a:xfrm>
-          <a:prstGeom prst="rect">
-            <a:avLst/>
-          </a:prstGeom>
-          <a:noFill/>
-          <a:ln/>
-        </p:spPr>
-        <p:txBody>
-          <a:bodyPr wrap="square" lIns="0" tIns="0" rIns="0" bIns="0" rtlCol="0" anchor="ctr">
-            <a:normAutofit/>
-          </a:bodyPr>
-          <a:lstStyle/>
-          <a:p>
-            <a:pPr algn="ctr" indent="0" marL="0">
-              <a:buNone/>
-            </a:pPr>
-            <a:r>
-              <a:rPr lang="en-US" sz="3600" b="1" dirty="0">
-                <a:solidFill>
-                  <a:srgbClr val="990011"/>
-                </a:solidFill>
-                <a:latin typeface="Times New Roman" pitchFamily="34" charset="0"/>
-                <a:ea typeface="Times New Roman" pitchFamily="34" charset="-122"/>
-                <a:cs typeface="Times New Roman" pitchFamily="34" charset="-120"/>
-              </a:rPr>
-              <a:t>2. The Standard Deviation</a:t>
-            </a:r>
-            <a:endParaRPr lang="en-US" sz="3600" dirty="0"/>
-          </a:p>
-        </p:txBody>
-      </p:sp>
-      <p:sp>
-        <p:nvSpPr>
-          <p:cNvPr id="4" name="Text 2"/>
-          <p:cNvSpPr/>
-          <p:nvPr/>
-        </p:nvSpPr>
-        <p:spPr>
-          <a:xfrm>
-            <a:off x="365760" y="1783080"/>
-            <a:ext cx="4846320" cy="4617720"/>
-          </a:xfrm>
-          <a:prstGeom prst="rect">
-            <a:avLst/>
-          </a:prstGeom>
-          <a:noFill/>
-          <a:ln/>
-        </p:spPr>
-        <p:txBody>
-          <a:bodyPr wrap="square" lIns="0" tIns="0" rIns="0" bIns="0" rtlCol="0" anchor="t"/>
-          <a:lstStyle/>
-          <a:p>
-            <a:pPr algn="l" indent="0" marL="0">
-              <a:spcAft>
-                <a:spcPts val="800"/>
-              </a:spcAft>
-              <a:buNone/>
-            </a:pPr>
-            <a:r>
-              <a:rPr lang="en-US" sz="3600" i="1" dirty="0">
-                <a:solidFill>
-                  <a:srgbClr val="111111"/>
-                </a:solidFill>
-                <a:latin typeface="Times New Roman" pitchFamily="34" charset="0"/>
-                <a:ea typeface="Times New Roman" pitchFamily="34" charset="-122"/>
-                <a:cs typeface="Times New Roman" pitchFamily="34" charset="-120"/>
-              </a:rPr>
-              <a:t>The standard deviation is calculated and interpreted as follows:</a:t>
-            </a:r>
-            <a:endParaRPr lang="en-US" sz="3600" dirty="0"/>
-          </a:p>
-          <a:p>
-            <a:pPr algn="l" indent="0" marL="0">
-              <a:spcAft>
-                <a:spcPts val="800"/>
-              </a:spcAft>
-              <a:buNone/>
-            </a:pPr>
-            <a:r>
-              <a:rPr lang="en-US" sz="3600" b="1" dirty="0">
-                <a:solidFill>
-                  <a:srgbClr val="111111"/>
-                </a:solidFill>
-                <a:latin typeface="Times New Roman" pitchFamily="34" charset="0"/>
-                <a:ea typeface="Times New Roman" pitchFamily="34" charset="-122"/>
-                <a:cs typeface="Times New Roman" pitchFamily="34" charset="-120"/>
-              </a:rPr>
-              <a:t>Formula: </a:t>
-            </a:r>
-            <a:pPr algn="l" indent="0" marL="0">
-              <a:spcAft>
-                <a:spcPts val="800"/>
-              </a:spcAft>
-              <a:buNone/>
-            </a:pPr>
-            <a:r>
-              <a:rPr lang="en-US" sz="3600" dirty="0">
-                <a:solidFill>
-                  <a:srgbClr val="111111"/>
-                </a:solidFill>
-                <a:latin typeface="Times New Roman" pitchFamily="34" charset="0"/>
-                <a:ea typeface="Times New Roman" pitchFamily="34" charset="-122"/>
-                <a:cs typeface="Times New Roman" pitchFamily="34" charset="-120"/>
-              </a:rPr>
-              <a:t>SD = √[Σ(x − x̄)² ÷ n]; it is the most used measure of dispersion in GCE geography.</a:t>
-            </a:r>
-            <a:endParaRPr lang="en-US" sz="3600" dirty="0"/>
-          </a:p>
-        </p:txBody>
-      </p:sp>
       <p:pic>
         <p:nvPicPr>
-          <p:cNvPr id="5" name="Image 0" descr="/home/claude/f4/img/v2/sd_big.png">    </p:cNvPr>
+          <p:cNvPr id="3" name="Image 0" descr="/home/claude/f4/img/minesec_sheet.png">    </p:cNvPr>
           <p:cNvPicPr>
             <a:picLocks noChangeAspect="1"/>
           </p:cNvPicPr>
@@ -16281,8 +16057,8 @@
         </p:blipFill>
         <p:spPr>
           <a:xfrm>
-            <a:off x="5349240" y="2617506"/>
-            <a:ext cx="6659575" cy="2601397"/>
+            <a:off x="0" y="658368"/>
+            <a:ext cx="5120640" cy="5833872"/>
           </a:xfrm>
           <a:prstGeom prst="rect">
             <a:avLst/>
@@ -16291,14 +16067,14 @@
       </p:pic>
       <p:sp>
         <p:nvSpPr>
-          <p:cNvPr id="6" name="Text 3"/>
+          <p:cNvPr id="4" name="Text 1"/>
           <p:cNvSpPr/>
           <p:nvPr/>
         </p:nvSpPr>
         <p:spPr>
           <a:xfrm>
-            <a:off x="5349240" y="6089904"/>
-            <a:ext cx="6659575" cy="347472"/>
+            <a:off x="5349240" y="1005840"/>
+            <a:ext cx="6522415" cy="731520"/>
           </a:xfrm>
           <a:prstGeom prst="rect">
             <a:avLst/>
@@ -16307,24 +16083,85 @@
           <a:ln/>
         </p:spPr>
         <p:txBody>
-          <a:bodyPr wrap="square" lIns="0" tIns="0" rIns="0" bIns="0" rtlCol="0" anchor="ctr"/>
+          <a:bodyPr wrap="square" lIns="0" tIns="0" rIns="0" bIns="0" rtlCol="0" anchor="ctr">
+            <a:normAutofit/>
+          </a:bodyPr>
           <a:lstStyle/>
           <a:p>
             <a:pPr algn="ctr" indent="0" marL="0">
               <a:buNone/>
             </a:pPr>
             <a:r>
-              <a:rPr lang="en-US" sz="1600" i="1" dirty="0">
-                <a:solidFill>
-                  <a:srgbClr val="555555"/>
+              <a:rPr lang="en-US" sz="3600" b="1" dirty="0">
+                <a:solidFill>
+                  <a:srgbClr val="990011"/>
                 </a:solidFill>
                 <a:latin typeface="Times New Roman" pitchFamily="34" charset="0"/>
                 <a:ea typeface="Times New Roman" pitchFamily="34" charset="-122"/>
                 <a:cs typeface="Times New Roman" pitchFamily="34" charset="-120"/>
               </a:rPr>
-              <a:t>Illustration: a standard deviation table</a:t>
-            </a:r>
-            <a:endParaRPr lang="en-US" sz="1600" dirty="0"/>
+              <a:t>1. The Variance</a:t>
+            </a:r>
+            <a:endParaRPr lang="en-US" sz="3600" dirty="0"/>
+          </a:p>
+        </p:txBody>
+      </p:sp>
+      <p:sp>
+        <p:nvSpPr>
+          <p:cNvPr id="5" name="Text 2"/>
+          <p:cNvSpPr/>
+          <p:nvPr/>
+        </p:nvSpPr>
+        <p:spPr>
+          <a:xfrm>
+            <a:off x="5349240" y="1783080"/>
+            <a:ext cx="6522415" cy="4663440"/>
+          </a:xfrm>
+          <a:prstGeom prst="rect">
+            <a:avLst/>
+          </a:prstGeom>
+          <a:noFill/>
+          <a:ln/>
+        </p:spPr>
+        <p:txBody>
+          <a:bodyPr wrap="square" lIns="0" tIns="0" rIns="0" bIns="0" rtlCol="0" anchor="t"/>
+          <a:lstStyle/>
+          <a:p>
+            <a:pPr algn="l" indent="0" marL="0">
+              <a:spcAft>
+                <a:spcPts val="800"/>
+              </a:spcAft>
+              <a:buNone/>
+            </a:pPr>
+            <a:r>
+              <a:rPr lang="en-US" sz="4000" b="1" dirty="0">
+                <a:solidFill>
+                  <a:srgbClr val="111111"/>
+                </a:solidFill>
+                <a:latin typeface="Times New Roman" pitchFamily="34" charset="0"/>
+                <a:ea typeface="Times New Roman" pitchFamily="34" charset="-122"/>
+                <a:cs typeface="Times New Roman" pitchFamily="34" charset="-120"/>
+              </a:rPr>
+              <a:t>Sample or population: </a:t>
+            </a:r>
+            <a:pPr algn="l" indent="0" marL="0">
+              <a:spcAft>
+                <a:spcPts val="800"/>
+              </a:spcAft>
+              <a:buNone/>
+            </a:pPr>
+            <a:r>
+              <a:rPr lang="en-US" sz="4000" dirty="0">
+                <a:solidFill>
+                  <a:srgbClr val="111111"/>
+                </a:solidFill>
+                <a:latin typeface="Times New Roman" pitchFamily="34" charset="0"/>
+                <a:ea typeface="Times New Roman" pitchFamily="34" charset="-122"/>
+                <a:cs typeface="Times New Roman" pitchFamily="34" charset="-120"/>
+              </a:rPr>
+              <a:t>For a sample, statisticians divide by n − 1 instead of n. For most GCE data, treated as a whole set, we divide by n.</a:t>
+            </a:r>
+            <a:endParaRPr lang="en-US" sz="4000" dirty="0"/>
           </a:p>
         </p:txBody>
       </p:sp>
@@ -16490,7 +16327,7 @@
         <p:spPr>
           <a:xfrm>
             <a:off x="365760" y="1783080"/>
-            <a:ext cx="4846320" cy="4617720"/>
+            <a:ext cx="6035040" cy="4617720"/>
           </a:xfrm>
           <a:prstGeom prst="rect">
             <a:avLst/>
@@ -16509,7 +16346,7 @@
               <a:buNone/>
             </a:pPr>
             <a:r>
-              <a:rPr lang="en-US" sz="3600" b="1" dirty="0">
+              <a:rPr lang="en-US" sz="3600" i="1" dirty="0">
                 <a:solidFill>
                   <a:srgbClr val="111111"/>
                 </a:solidFill>
@@ -16517,8 +16354,11 @@
                 <a:ea typeface="Times New Roman" pitchFamily="34" charset="-122"/>
                 <a:cs typeface="Times New Roman" pitchFamily="34" charset="-120"/>
               </a:rPr>
-              <a:t>Example 1: </a:t>
-            </a:r>
+              <a:t>The standard deviation is calculated and interpreted as follows:</a:t>
+            </a:r>
+            <a:endParaRPr lang="en-US" sz="3600" dirty="0"/>
+          </a:p>
+          <a:p>
             <a:pPr algn="l" indent="0" marL="0">
               <a:spcAft>
                 <a:spcPts val="800"/>
@@ -16526,7 +16366,7 @@
               <a:buNone/>
             </a:pPr>
             <a:r>
-              <a:rPr lang="en-US" sz="3600" dirty="0">
+              <a:rPr lang="en-US" sz="3600" b="1" dirty="0">
                 <a:solidFill>
                   <a:srgbClr val="111111"/>
                 </a:solidFill>
@@ -16534,7 +16374,24 @@
                 <a:ea typeface="Times New Roman" pitchFamily="34" charset="-122"/>
                 <a:cs typeface="Times New Roman" pitchFamily="34" charset="-120"/>
               </a:rPr>
-              <a:t>Minimum ages in 10 households (5, 8, 3, 2, 7, 9, 8, 2, 2, 4): mean = 5, Σ(x − x̄)² = 70, variance = 7, SD = √7 ≈ 2.65 years.</a:t>
+              <a:t>Formula: </a:t>
+            </a:r>
+            <a:pPr algn="l" indent="0" marL="0">
+              <a:spcAft>
+                <a:spcPts val="800"/>
+              </a:spcAft>
+              <a:buNone/>
+            </a:pPr>
+            <a:r>
+              <a:rPr lang="en-US" sz="3600" dirty="0">
+                <a:solidFill>
+                  <a:srgbClr val="111111"/>
+                </a:solidFill>
+                <a:latin typeface="Times New Roman" pitchFamily="34" charset="0"/>
+                <a:ea typeface="Times New Roman" pitchFamily="34" charset="-122"/>
+                <a:cs typeface="Times New Roman" pitchFamily="34" charset="-120"/>
+              </a:rPr>
+              <a:t>SD = √[Σ(x − x̄)² ÷ n], the square root of the variance. It is the most used measure of dispersion in GCE geography.</a:t>
             </a:r>
             <a:endParaRPr lang="en-US" sz="3600" dirty="0"/>
           </a:p>
@@ -16542,7 +16399,7 @@
       </p:sp>
       <p:pic>
         <p:nvPicPr>
-          <p:cNvPr id="5" name="Image 0" descr="/home/claude/f4/img/v2/stat2_sd.png">    </p:cNvPr>
+          <p:cNvPr id="5" name="Image 0" descr="/home/claude/f4/img/v2/sd_big.png">    </p:cNvPr>
           <p:cNvPicPr>
             <a:picLocks noChangeAspect="1"/>
           </p:cNvPicPr>
@@ -16556,8 +16413,8 @@
         </p:blipFill>
         <p:spPr>
           <a:xfrm>
-            <a:off x="5349240" y="2617506"/>
-            <a:ext cx="6659575" cy="2601397"/>
+            <a:off x="6537960" y="2849678"/>
+            <a:ext cx="5470855" cy="2137053"/>
           </a:xfrm>
           <a:prstGeom prst="rect">
             <a:avLst/>
@@ -16572,8 +16429,8 @@
         </p:nvSpPr>
         <p:spPr>
           <a:xfrm>
-            <a:off x="5349240" y="6089904"/>
-            <a:ext cx="6659575" cy="347472"/>
+            <a:off x="6537960" y="6089904"/>
+            <a:ext cx="5470855" cy="347472"/>
           </a:xfrm>
           <a:prstGeom prst="rect">
             <a:avLst/>
@@ -16597,7 +16454,7 @@
                 <a:ea typeface="Times New Roman" pitchFamily="34" charset="-122"/>
                 <a:cs typeface="Times New Roman" pitchFamily="34" charset="-120"/>
               </a:rPr>
-              <a:t>Illustration: household ages</a:t>
+              <a:t>Illustration: the standard deviation</a:t>
             </a:r>
             <a:endParaRPr lang="en-US" sz="1600" dirty="0"/>
           </a:p>
@@ -16715,9 +16572,109 @@
           </a:p>
         </p:txBody>
       </p:sp>
+      <p:sp>
+        <p:nvSpPr>
+          <p:cNvPr id="3" name="Text 1"/>
+          <p:cNvSpPr/>
+          <p:nvPr/>
+        </p:nvSpPr>
+        <p:spPr>
+          <a:xfrm>
+            <a:off x="365760" y="1005840"/>
+            <a:ext cx="11460175" cy="731520"/>
+          </a:xfrm>
+          <a:prstGeom prst="rect">
+            <a:avLst/>
+          </a:prstGeom>
+          <a:noFill/>
+          <a:ln/>
+        </p:spPr>
+        <p:txBody>
+          <a:bodyPr wrap="square" lIns="0" tIns="0" rIns="0" bIns="0" rtlCol="0" anchor="ctr">
+            <a:normAutofit/>
+          </a:bodyPr>
+          <a:lstStyle/>
+          <a:p>
+            <a:pPr algn="ctr" indent="0" marL="0">
+              <a:buNone/>
+            </a:pPr>
+            <a:r>
+              <a:rPr lang="en-US" sz="3600" b="1" dirty="0">
+                <a:solidFill>
+                  <a:srgbClr val="990011"/>
+                </a:solidFill>
+                <a:latin typeface="Times New Roman" pitchFamily="34" charset="0"/>
+                <a:ea typeface="Times New Roman" pitchFamily="34" charset="-122"/>
+                <a:cs typeface="Times New Roman" pitchFamily="34" charset="-120"/>
+              </a:rPr>
+              <a:t>2. The Standard Deviation</a:t>
+            </a:r>
+            <a:endParaRPr lang="en-US" sz="3600" dirty="0"/>
+          </a:p>
+        </p:txBody>
+      </p:sp>
+      <p:sp>
+        <p:nvSpPr>
+          <p:cNvPr id="4" name="Text 2"/>
+          <p:cNvSpPr/>
+          <p:nvPr/>
+        </p:nvSpPr>
+        <p:spPr>
+          <a:xfrm>
+            <a:off x="365760" y="1783080"/>
+            <a:ext cx="6035040" cy="4617720"/>
+          </a:xfrm>
+          <a:prstGeom prst="rect">
+            <a:avLst/>
+          </a:prstGeom>
+          <a:noFill/>
+          <a:ln/>
+        </p:spPr>
+        <p:txBody>
+          <a:bodyPr wrap="square" lIns="0" tIns="0" rIns="0" bIns="0" rtlCol="0" anchor="t"/>
+          <a:lstStyle/>
+          <a:p>
+            <a:pPr algn="l" indent="0" marL="0">
+              <a:spcAft>
+                <a:spcPts val="800"/>
+              </a:spcAft>
+              <a:buNone/>
+            </a:pPr>
+            <a:r>
+              <a:rPr lang="en-US" sz="3600" b="1" dirty="0">
+                <a:solidFill>
+                  <a:srgbClr val="111111"/>
+                </a:solidFill>
+                <a:latin typeface="Times New Roman" pitchFamily="34" charset="0"/>
+                <a:ea typeface="Times New Roman" pitchFamily="34" charset="-122"/>
+                <a:cs typeface="Times New Roman" pitchFamily="34" charset="-120"/>
+              </a:rPr>
+              <a:t>Example 1: </a:t>
+            </a:r>
+            <a:pPr algn="l" indent="0" marL="0">
+              <a:spcAft>
+                <a:spcPts val="800"/>
+              </a:spcAft>
+              <a:buNone/>
+            </a:pPr>
+            <a:r>
+              <a:rPr lang="en-US" sz="3600" dirty="0">
+                <a:solidFill>
+                  <a:srgbClr val="111111"/>
+                </a:solidFill>
+                <a:latin typeface="Times New Roman" pitchFamily="34" charset="0"/>
+                <a:ea typeface="Times New Roman" pitchFamily="34" charset="-122"/>
+                <a:cs typeface="Times New Roman" pitchFamily="34" charset="-120"/>
+              </a:rPr>
+              <a:t>The minimum ages in 10 households are 5, 8, 3, 2, 7, 9, 8, 2, 2 and 4, so the mean is 5 and Σ(x − x̄)² = 70. The variance is 70 ÷ 10 = 7 and the SD is √7 ≈ 2.65 years.</a:t>
+            </a:r>
+            <a:endParaRPr lang="en-US" sz="3600" dirty="0"/>
+          </a:p>
+        </p:txBody>
+      </p:sp>
       <p:pic>
         <p:nvPicPr>
-          <p:cNvPr id="3" name="Image 0" descr="/home/claude/f4/img/minesec_sheet.png">    </p:cNvPr>
+          <p:cNvPr id="5" name="Image 0" descr="/home/claude/f4/img/v2/stat2_sd.png">    </p:cNvPr>
           <p:cNvPicPr>
             <a:picLocks noChangeAspect="1"/>
           </p:cNvPicPr>
@@ -16731,8 +16688,8 @@
         </p:blipFill>
         <p:spPr>
           <a:xfrm>
-            <a:off x="0" y="658368"/>
-            <a:ext cx="3840480" cy="5833872"/>
+            <a:off x="6537960" y="2849678"/>
+            <a:ext cx="5470855" cy="2137053"/>
           </a:xfrm>
           <a:prstGeom prst="rect">
             <a:avLst/>
@@ -16741,14 +16698,14 @@
       </p:pic>
       <p:sp>
         <p:nvSpPr>
-          <p:cNvPr id="4" name="Text 1"/>
+          <p:cNvPr id="6" name="Text 3"/>
           <p:cNvSpPr/>
           <p:nvPr/>
         </p:nvSpPr>
         <p:spPr>
           <a:xfrm>
-            <a:off x="4069080" y="1005840"/>
-            <a:ext cx="7802575" cy="731520"/>
+            <a:off x="6537960" y="6089904"/>
+            <a:ext cx="5470855" cy="347472"/>
           </a:xfrm>
           <a:prstGeom prst="rect">
             <a:avLst/>
@@ -16757,122 +16714,24 @@
           <a:ln/>
         </p:spPr>
         <p:txBody>
-          <a:bodyPr wrap="square" lIns="0" tIns="0" rIns="0" bIns="0" rtlCol="0" anchor="ctr">
-            <a:normAutofit/>
-          </a:bodyPr>
+          <a:bodyPr wrap="square" lIns="0" tIns="0" rIns="0" bIns="0" rtlCol="0" anchor="ctr"/>
           <a:lstStyle/>
           <a:p>
             <a:pPr algn="ctr" indent="0" marL="0">
               <a:buNone/>
             </a:pPr>
             <a:r>
-              <a:rPr lang="en-US" sz="3600" b="1" dirty="0">
-                <a:solidFill>
-                  <a:srgbClr val="990011"/>
+              <a:rPr lang="en-US" sz="1600" i="1" dirty="0">
+                <a:solidFill>
+                  <a:srgbClr val="555555"/>
                 </a:solidFill>
                 <a:latin typeface="Times New Roman" pitchFamily="34" charset="0"/>
                 <a:ea typeface="Times New Roman" pitchFamily="34" charset="-122"/>
                 <a:cs typeface="Times New Roman" pitchFamily="34" charset="-120"/>
               </a:rPr>
-              <a:t>2. The Standard Deviation</a:t>
-            </a:r>
-            <a:endParaRPr lang="en-US" sz="3600" dirty="0"/>
-          </a:p>
-        </p:txBody>
-      </p:sp>
-      <p:sp>
-        <p:nvSpPr>
-          <p:cNvPr id="5" name="Text 2"/>
-          <p:cNvSpPr/>
-          <p:nvPr/>
-        </p:nvSpPr>
-        <p:spPr>
-          <a:xfrm>
-            <a:off x="4069080" y="1783080"/>
-            <a:ext cx="7802575" cy="4663440"/>
-          </a:xfrm>
-          <a:prstGeom prst="rect">
-            <a:avLst/>
-          </a:prstGeom>
-          <a:noFill/>
-          <a:ln/>
-        </p:spPr>
-        <p:txBody>
-          <a:bodyPr wrap="square" lIns="0" tIns="0" rIns="0" bIns="0" rtlCol="0" anchor="t"/>
-          <a:lstStyle/>
-          <a:p>
-            <a:pPr algn="l" indent="0" marL="0">
-              <a:spcAft>
-                <a:spcPts val="800"/>
-              </a:spcAft>
-              <a:buNone/>
-            </a:pPr>
-            <a:r>
-              <a:rPr lang="en-US" sz="4000" b="1" dirty="0">
-                <a:solidFill>
-                  <a:srgbClr val="111111"/>
-                </a:solidFill>
-                <a:latin typeface="Times New Roman" pitchFamily="34" charset="0"/>
-                <a:ea typeface="Times New Roman" pitchFamily="34" charset="-122"/>
-                <a:cs typeface="Times New Roman" pitchFamily="34" charset="-120"/>
-              </a:rPr>
-              <a:t>Example 2: </a:t>
-            </a:r>
-            <a:pPr algn="l" indent="0" marL="0">
-              <a:spcAft>
-                <a:spcPts val="800"/>
-              </a:spcAft>
-              <a:buNone/>
-            </a:pPr>
-            <a:r>
-              <a:rPr lang="en-US" sz="4000" dirty="0">
-                <a:solidFill>
-                  <a:srgbClr val="111111"/>
-                </a:solidFill>
-                <a:latin typeface="Times New Roman" pitchFamily="34" charset="0"/>
-                <a:ea typeface="Times New Roman" pitchFamily="34" charset="-122"/>
-                <a:cs typeface="Times New Roman" pitchFamily="34" charset="-120"/>
-              </a:rPr>
-              <a:t>12, 6, 7, 3, 15, 10, 18, 5: mean = 9.5, Σ(x − x̄)² = 190, variance = 23.75, SD ≈ 4.87.</a:t>
-            </a:r>
-            <a:endParaRPr lang="en-US" sz="4000" dirty="0"/>
-          </a:p>
-          <a:p>
-            <a:pPr algn="l" indent="0" marL="0">
-              <a:spcAft>
-                <a:spcPts val="800"/>
-              </a:spcAft>
-              <a:buNone/>
-            </a:pPr>
-            <a:r>
-              <a:rPr lang="en-US" sz="4000" b="1" dirty="0">
-                <a:solidFill>
-                  <a:srgbClr val="111111"/>
-                </a:solidFill>
-                <a:latin typeface="Times New Roman" pitchFamily="34" charset="0"/>
-                <a:ea typeface="Times New Roman" pitchFamily="34" charset="-122"/>
-                <a:cs typeface="Times New Roman" pitchFamily="34" charset="-120"/>
-              </a:rPr>
-              <a:t>Interpretation: </a:t>
-            </a:r>
-            <a:pPr algn="l" indent="0" marL="0">
-              <a:spcAft>
-                <a:spcPts val="800"/>
-              </a:spcAft>
-              <a:buNone/>
-            </a:pPr>
-            <a:r>
-              <a:rPr lang="en-US" sz="4000" dirty="0">
-                <a:solidFill>
-                  <a:srgbClr val="111111"/>
-                </a:solidFill>
-                <a:latin typeface="Times New Roman" pitchFamily="34" charset="0"/>
-                <a:ea typeface="Times New Roman" pitchFamily="34" charset="-122"/>
-                <a:cs typeface="Times New Roman" pitchFamily="34" charset="-120"/>
-              </a:rPr>
-              <a:t>A small SD means values cluster close to the mean; a large SD means they are widely spread.</a:t>
-            </a:r>
-            <a:endParaRPr lang="en-US" sz="4000" dirty="0"/>
+              <a:t>Illustration: a worked example</a:t>
+            </a:r>
+            <a:endParaRPr lang="en-US" sz="1600" dirty="0"/>
           </a:p>
         </p:txBody>
       </p:sp>
@@ -17047,7 +16906,7 @@
                 <a:ea typeface="Times New Roman" pitchFamily="34" charset="-122"/>
                 <a:cs typeface="Times New Roman" pitchFamily="34" charset="-120"/>
               </a:rPr>
-              <a:t>2. The Standard Deviation (continued)</a:t>
+              <a:t>2. The Standard Deviation</a:t>
             </a:r>
             <a:endParaRPr lang="en-US" sz="3600" dirty="0"/>
           </a:p>
@@ -17089,7 +16948,7 @@
                 <a:ea typeface="Times New Roman" pitchFamily="34" charset="-122"/>
                 <a:cs typeface="Times New Roman" pitchFamily="34" charset="-120"/>
               </a:rPr>
-              <a:t>Advantage: </a:t>
+              <a:t>Example 2: </a:t>
             </a:r>
             <a:pPr algn="l" indent="0" marL="0">
               <a:spcAft>
@@ -17106,7 +16965,7 @@
                 <a:ea typeface="Times New Roman" pitchFamily="34" charset="-122"/>
                 <a:cs typeface="Times New Roman" pitchFamily="34" charset="-120"/>
               </a:rPr>
-              <a:t>Unlike the range and the IQR, it uses every value in the set.</a:t>
+              <a:t>For 12, 6, 7, 3, 15, 10, 18 and 5, the mean is 9.5 and Σ(x − x̄)² = 190. The variance is 190 ÷ 8 = 23.75 and the SD is about 4.87.</a:t>
             </a:r>
             <a:endParaRPr lang="en-US" sz="4000" dirty="0"/>
           </a:p>
@@ -17224,129 +17083,9 @@
           </a:p>
         </p:txBody>
       </p:sp>
-      <p:sp>
-        <p:nvSpPr>
-          <p:cNvPr id="3" name="Text 1"/>
-          <p:cNvSpPr/>
-          <p:nvPr/>
-        </p:nvSpPr>
-        <p:spPr>
-          <a:xfrm>
-            <a:off x="365760" y="1005840"/>
-            <a:ext cx="11460175" cy="731520"/>
-          </a:xfrm>
-          <a:prstGeom prst="rect">
-            <a:avLst/>
-          </a:prstGeom>
-          <a:noFill/>
-          <a:ln/>
-        </p:spPr>
-        <p:txBody>
-          <a:bodyPr wrap="square" lIns="0" tIns="0" rIns="0" bIns="0" rtlCol="0" anchor="ctr">
-            <a:normAutofit/>
-          </a:bodyPr>
-          <a:lstStyle/>
-          <a:p>
-            <a:pPr algn="ctr" indent="0" marL="0">
-              <a:buNone/>
-            </a:pPr>
-            <a:r>
-              <a:rPr lang="en-US" sz="3600" b="1" dirty="0">
-                <a:solidFill>
-                  <a:srgbClr val="990011"/>
-                </a:solidFill>
-                <a:latin typeface="Times New Roman" pitchFamily="34" charset="0"/>
-                <a:ea typeface="Times New Roman" pitchFamily="34" charset="-122"/>
-                <a:cs typeface="Times New Roman" pitchFamily="34" charset="-120"/>
-              </a:rPr>
-              <a:t>3. The Coefficient of Variation</a:t>
-            </a:r>
-            <a:endParaRPr lang="en-US" sz="3600" dirty="0"/>
-          </a:p>
-        </p:txBody>
-      </p:sp>
-      <p:sp>
-        <p:nvSpPr>
-          <p:cNvPr id="4" name="Text 2"/>
-          <p:cNvSpPr/>
-          <p:nvPr/>
-        </p:nvSpPr>
-        <p:spPr>
-          <a:xfrm>
-            <a:off x="365760" y="1783080"/>
-            <a:ext cx="4846320" cy="4617720"/>
-          </a:xfrm>
-          <a:prstGeom prst="rect">
-            <a:avLst/>
-          </a:prstGeom>
-          <a:noFill/>
-          <a:ln/>
-        </p:spPr>
-        <p:txBody>
-          <a:bodyPr wrap="square" lIns="0" tIns="0" rIns="0" bIns="0" rtlCol="0" anchor="t"/>
-          <a:lstStyle/>
-          <a:p>
-            <a:pPr algn="l" indent="0" marL="0">
-              <a:spcAft>
-                <a:spcPts val="800"/>
-              </a:spcAft>
-              <a:buNone/>
-            </a:pPr>
-            <a:r>
-              <a:rPr lang="en-US" sz="3600" i="1" dirty="0">
-                <a:solidFill>
-                  <a:srgbClr val="111111"/>
-                </a:solidFill>
-                <a:latin typeface="Times New Roman" pitchFamily="34" charset="0"/>
-                <a:ea typeface="Times New Roman" pitchFamily="34" charset="-122"/>
-                <a:cs typeface="Times New Roman" pitchFamily="34" charset="-120"/>
-              </a:rPr>
-              <a:t>The coefficient of variation is calculated and interpreted as follows:</a:t>
-            </a:r>
-            <a:endParaRPr lang="en-US" sz="3600" dirty="0"/>
-          </a:p>
-          <a:p>
-            <a:pPr algn="l" indent="0" marL="0">
-              <a:spcAft>
-                <a:spcPts val="800"/>
-              </a:spcAft>
-              <a:buNone/>
-            </a:pPr>
-            <a:r>
-              <a:rPr lang="en-US" sz="3600" b="1" dirty="0">
-                <a:solidFill>
-                  <a:srgbClr val="111111"/>
-                </a:solidFill>
-                <a:latin typeface="Times New Roman" pitchFamily="34" charset="0"/>
-                <a:ea typeface="Times New Roman" pitchFamily="34" charset="-122"/>
-                <a:cs typeface="Times New Roman" pitchFamily="34" charset="-120"/>
-              </a:rPr>
-              <a:t>Formula: </a:t>
-            </a:r>
-            <a:pPr algn="l" indent="0" marL="0">
-              <a:spcAft>
-                <a:spcPts val="800"/>
-              </a:spcAft>
-              <a:buNone/>
-            </a:pPr>
-            <a:r>
-              <a:rPr lang="en-US" sz="3600" dirty="0">
-                <a:solidFill>
-                  <a:srgbClr val="111111"/>
-                </a:solidFill>
-                <a:latin typeface="Times New Roman" pitchFamily="34" charset="0"/>
-                <a:ea typeface="Times New Roman" pitchFamily="34" charset="-122"/>
-                <a:cs typeface="Times New Roman" pitchFamily="34" charset="-120"/>
-              </a:rPr>
-              <a:t>CV = SD ÷ mean × 100 (%).</a:t>
-            </a:r>
-            <a:endParaRPr lang="en-US" sz="3600" dirty="0"/>
-          </a:p>
-        </p:txBody>
-      </p:sp>
       <p:pic>
         <p:nvPicPr>
-          <p:cNvPr id="5" name="Image 0" descr="/home/claude/f4/img/v2/stat2_cv.png">    </p:cNvPr>
+          <p:cNvPr id="3" name="Image 0" descr="/home/claude/f4/img/minesec_sheet.png">    </p:cNvPr>
           <p:cNvPicPr>
             <a:picLocks noChangeAspect="1"/>
           </p:cNvPicPr>
@@ -17360,8 +17099,8 @@
         </p:blipFill>
         <p:spPr>
           <a:xfrm>
-            <a:off x="5349240" y="2617506"/>
-            <a:ext cx="6659575" cy="2601397"/>
+            <a:off x="0" y="658368"/>
+            <a:ext cx="5120640" cy="5833872"/>
           </a:xfrm>
           <a:prstGeom prst="rect">
             <a:avLst/>
@@ -17370,14 +17109,14 @@
       </p:pic>
       <p:sp>
         <p:nvSpPr>
-          <p:cNvPr id="6" name="Text 3"/>
+          <p:cNvPr id="4" name="Text 1"/>
           <p:cNvSpPr/>
           <p:nvPr/>
         </p:nvSpPr>
         <p:spPr>
           <a:xfrm>
-            <a:off x="5349240" y="6089904"/>
-            <a:ext cx="6659575" cy="347472"/>
+            <a:off x="5349240" y="1005840"/>
+            <a:ext cx="6522415" cy="731520"/>
           </a:xfrm>
           <a:prstGeom prst="rect">
             <a:avLst/>
@@ -17386,24 +17125,85 @@
           <a:ln/>
         </p:spPr>
         <p:txBody>
-          <a:bodyPr wrap="square" lIns="0" tIns="0" rIns="0" bIns="0" rtlCol="0" anchor="ctr"/>
+          <a:bodyPr wrap="square" lIns="0" tIns="0" rIns="0" bIns="0" rtlCol="0" anchor="ctr">
+            <a:normAutofit/>
+          </a:bodyPr>
           <a:lstStyle/>
           <a:p>
             <a:pPr algn="ctr" indent="0" marL="0">
               <a:buNone/>
             </a:pPr>
             <a:r>
-              <a:rPr lang="en-US" sz="1600" i="1" dirty="0">
-                <a:solidFill>
-                  <a:srgbClr val="555555"/>
+              <a:rPr lang="en-US" sz="3600" b="1" dirty="0">
+                <a:solidFill>
+                  <a:srgbClr val="990011"/>
                 </a:solidFill>
                 <a:latin typeface="Times New Roman" pitchFamily="34" charset="0"/>
                 <a:ea typeface="Times New Roman" pitchFamily="34" charset="-122"/>
                 <a:cs typeface="Times New Roman" pitchFamily="34" charset="-120"/>
               </a:rPr>
-              <a:t>Illustration: the coefficient of variation</a:t>
-            </a:r>
-            <a:endParaRPr lang="en-US" sz="1600" dirty="0"/>
+              <a:t>2. The Standard Deviation</a:t>
+            </a:r>
+            <a:endParaRPr lang="en-US" sz="3600" dirty="0"/>
+          </a:p>
+        </p:txBody>
+      </p:sp>
+      <p:sp>
+        <p:nvSpPr>
+          <p:cNvPr id="5" name="Text 2"/>
+          <p:cNvSpPr/>
+          <p:nvPr/>
+        </p:nvSpPr>
+        <p:spPr>
+          <a:xfrm>
+            <a:off x="5349240" y="1783080"/>
+            <a:ext cx="6522415" cy="4663440"/>
+          </a:xfrm>
+          <a:prstGeom prst="rect">
+            <a:avLst/>
+          </a:prstGeom>
+          <a:noFill/>
+          <a:ln/>
+        </p:spPr>
+        <p:txBody>
+          <a:bodyPr wrap="square" lIns="0" tIns="0" rIns="0" bIns="0" rtlCol="0" anchor="t"/>
+          <a:lstStyle/>
+          <a:p>
+            <a:pPr algn="l" indent="0" marL="0">
+              <a:spcAft>
+                <a:spcPts val="800"/>
+              </a:spcAft>
+              <a:buNone/>
+            </a:pPr>
+            <a:r>
+              <a:rPr lang="en-US" sz="4000" b="1" dirty="0">
+                <a:solidFill>
+                  <a:srgbClr val="111111"/>
+                </a:solidFill>
+                <a:latin typeface="Times New Roman" pitchFamily="34" charset="0"/>
+                <a:ea typeface="Times New Roman" pitchFamily="34" charset="-122"/>
+                <a:cs typeface="Times New Roman" pitchFamily="34" charset="-120"/>
+              </a:rPr>
+              <a:t>Interpretation: </a:t>
+            </a:r>
+            <a:pPr algn="l" indent="0" marL="0">
+              <a:spcAft>
+                <a:spcPts val="800"/>
+              </a:spcAft>
+              <a:buNone/>
+            </a:pPr>
+            <a:r>
+              <a:rPr lang="en-US" sz="4000" dirty="0">
+                <a:solidFill>
+                  <a:srgbClr val="111111"/>
+                </a:solidFill>
+                <a:latin typeface="Times New Roman" pitchFamily="34" charset="0"/>
+                <a:ea typeface="Times New Roman" pitchFamily="34" charset="-122"/>
+                <a:cs typeface="Times New Roman" pitchFamily="34" charset="-120"/>
+              </a:rPr>
+              <a:t>A small SD means the values cluster close to the mean, while a large SD means they are widely spread. Unlike the range and the IQR, it uses every value in the set.</a:t>
+            </a:r>
+            <a:endParaRPr lang="en-US" sz="4000" dirty="0"/>
           </a:p>
         </p:txBody>
       </p:sp>
@@ -17519,9 +17319,129 @@
           </a:p>
         </p:txBody>
       </p:sp>
+      <p:sp>
+        <p:nvSpPr>
+          <p:cNvPr id="3" name="Text 1"/>
+          <p:cNvSpPr/>
+          <p:nvPr/>
+        </p:nvSpPr>
+        <p:spPr>
+          <a:xfrm>
+            <a:off x="365760" y="1005840"/>
+            <a:ext cx="11460175" cy="731520"/>
+          </a:xfrm>
+          <a:prstGeom prst="rect">
+            <a:avLst/>
+          </a:prstGeom>
+          <a:noFill/>
+          <a:ln/>
+        </p:spPr>
+        <p:txBody>
+          <a:bodyPr wrap="square" lIns="0" tIns="0" rIns="0" bIns="0" rtlCol="0" anchor="ctr">
+            <a:normAutofit/>
+          </a:bodyPr>
+          <a:lstStyle/>
+          <a:p>
+            <a:pPr algn="ctr" indent="0" marL="0">
+              <a:buNone/>
+            </a:pPr>
+            <a:r>
+              <a:rPr lang="en-US" sz="3600" b="1" dirty="0">
+                <a:solidFill>
+                  <a:srgbClr val="990011"/>
+                </a:solidFill>
+                <a:latin typeface="Times New Roman" pitchFamily="34" charset="0"/>
+                <a:ea typeface="Times New Roman" pitchFamily="34" charset="-122"/>
+                <a:cs typeface="Times New Roman" pitchFamily="34" charset="-120"/>
+              </a:rPr>
+              <a:t>3. The Coefficient of Variation</a:t>
+            </a:r>
+            <a:endParaRPr lang="en-US" sz="3600" dirty="0"/>
+          </a:p>
+        </p:txBody>
+      </p:sp>
+      <p:sp>
+        <p:nvSpPr>
+          <p:cNvPr id="4" name="Text 2"/>
+          <p:cNvSpPr/>
+          <p:nvPr/>
+        </p:nvSpPr>
+        <p:spPr>
+          <a:xfrm>
+            <a:off x="365760" y="1783080"/>
+            <a:ext cx="6035040" cy="4617720"/>
+          </a:xfrm>
+          <a:prstGeom prst="rect">
+            <a:avLst/>
+          </a:prstGeom>
+          <a:noFill/>
+          <a:ln/>
+        </p:spPr>
+        <p:txBody>
+          <a:bodyPr wrap="square" lIns="0" tIns="0" rIns="0" bIns="0" rtlCol="0" anchor="t"/>
+          <a:lstStyle/>
+          <a:p>
+            <a:pPr algn="l" indent="0" marL="0">
+              <a:spcAft>
+                <a:spcPts val="800"/>
+              </a:spcAft>
+              <a:buNone/>
+            </a:pPr>
+            <a:r>
+              <a:rPr lang="en-US" sz="3600" i="1" dirty="0">
+                <a:solidFill>
+                  <a:srgbClr val="111111"/>
+                </a:solidFill>
+                <a:latin typeface="Times New Roman" pitchFamily="34" charset="0"/>
+                <a:ea typeface="Times New Roman" pitchFamily="34" charset="-122"/>
+                <a:cs typeface="Times New Roman" pitchFamily="34" charset="-120"/>
+              </a:rPr>
+              <a:t>The coefficient of variation is calculated and interpreted as follows:</a:t>
+            </a:r>
+            <a:endParaRPr lang="en-US" sz="3600" dirty="0"/>
+          </a:p>
+          <a:p>
+            <a:pPr algn="l" indent="0" marL="0">
+              <a:spcAft>
+                <a:spcPts val="800"/>
+              </a:spcAft>
+              <a:buNone/>
+            </a:pPr>
+            <a:r>
+              <a:rPr lang="en-US" sz="3600" b="1" dirty="0">
+                <a:solidFill>
+                  <a:srgbClr val="111111"/>
+                </a:solidFill>
+                <a:latin typeface="Times New Roman" pitchFamily="34" charset="0"/>
+                <a:ea typeface="Times New Roman" pitchFamily="34" charset="-122"/>
+                <a:cs typeface="Times New Roman" pitchFamily="34" charset="-120"/>
+              </a:rPr>
+              <a:t>Formula and example: </a:t>
+            </a:r>
+            <a:pPr algn="l" indent="0" marL="0">
+              <a:spcAft>
+                <a:spcPts val="800"/>
+              </a:spcAft>
+              <a:buNone/>
+            </a:pPr>
+            <a:r>
+              <a:rPr lang="en-US" sz="3600" dirty="0">
+                <a:solidFill>
+                  <a:srgbClr val="111111"/>
+                </a:solidFill>
+                <a:latin typeface="Times New Roman" pitchFamily="34" charset="0"/>
+                <a:ea typeface="Times New Roman" pitchFamily="34" charset="-122"/>
+                <a:cs typeface="Times New Roman" pitchFamily="34" charset="-120"/>
+              </a:rPr>
+              <a:t>CV = SD ÷ mean × 100, in %. A station with an SD of 10.05 and a mean of 13 has a CV of 10.05 ÷ 13 × 100 ≈ 77.3 %.</a:t>
+            </a:r>
+            <a:endParaRPr lang="en-US" sz="3600" dirty="0"/>
+          </a:p>
+        </p:txBody>
+      </p:sp>
       <p:pic>
         <p:nvPicPr>
-          <p:cNvPr id="3" name="Image 0" descr="/home/claude/f4/img/minesec_sheet.png">    </p:cNvPr>
+          <p:cNvPr id="5" name="Image 0" descr="/home/claude/f4/img/v2/stat2_cv.png">    </p:cNvPr>
           <p:cNvPicPr>
             <a:picLocks noChangeAspect="1"/>
           </p:cNvPicPr>
@@ -17535,8 +17455,8 @@
         </p:blipFill>
         <p:spPr>
           <a:xfrm>
-            <a:off x="0" y="658368"/>
-            <a:ext cx="5120640" cy="5833872"/>
+            <a:off x="6537960" y="2849678"/>
+            <a:ext cx="5470855" cy="2137053"/>
           </a:xfrm>
           <a:prstGeom prst="rect">
             <a:avLst/>
@@ -17545,14 +17465,14 @@
       </p:pic>
       <p:sp>
         <p:nvSpPr>
-          <p:cNvPr id="4" name="Text 1"/>
+          <p:cNvPr id="6" name="Text 3"/>
           <p:cNvSpPr/>
           <p:nvPr/>
         </p:nvSpPr>
         <p:spPr>
           <a:xfrm>
-            <a:off x="5349240" y="1005840"/>
-            <a:ext cx="6522415" cy="731520"/>
+            <a:off x="6537960" y="6089904"/>
+            <a:ext cx="5470855" cy="347472"/>
           </a:xfrm>
           <a:prstGeom prst="rect">
             <a:avLst/>
@@ -17561,85 +17481,24 @@
           <a:ln/>
         </p:spPr>
         <p:txBody>
-          <a:bodyPr wrap="square" lIns="0" tIns="0" rIns="0" bIns="0" rtlCol="0" anchor="ctr">
-            <a:normAutofit/>
-          </a:bodyPr>
+          <a:bodyPr wrap="square" lIns="0" tIns="0" rIns="0" bIns="0" rtlCol="0" anchor="ctr"/>
           <a:lstStyle/>
           <a:p>
             <a:pPr algn="ctr" indent="0" marL="0">
               <a:buNone/>
             </a:pPr>
             <a:r>
-              <a:rPr lang="en-US" sz="3600" b="1" dirty="0">
-                <a:solidFill>
-                  <a:srgbClr val="990011"/>
+              <a:rPr lang="en-US" sz="1600" i="1" dirty="0">
+                <a:solidFill>
+                  <a:srgbClr val="555555"/>
                 </a:solidFill>
                 <a:latin typeface="Times New Roman" pitchFamily="34" charset="0"/>
                 <a:ea typeface="Times New Roman" pitchFamily="34" charset="-122"/>
                 <a:cs typeface="Times New Roman" pitchFamily="34" charset="-120"/>
               </a:rPr>
-              <a:t>3. The Coefficient of Variation</a:t>
-            </a:r>
-            <a:endParaRPr lang="en-US" sz="3600" dirty="0"/>
-          </a:p>
-        </p:txBody>
-      </p:sp>
-      <p:sp>
-        <p:nvSpPr>
-          <p:cNvPr id="5" name="Text 2"/>
-          <p:cNvSpPr/>
-          <p:nvPr/>
-        </p:nvSpPr>
-        <p:spPr>
-          <a:xfrm>
-            <a:off x="5349240" y="1783080"/>
-            <a:ext cx="6522415" cy="4663440"/>
-          </a:xfrm>
-          <a:prstGeom prst="rect">
-            <a:avLst/>
-          </a:prstGeom>
-          <a:noFill/>
-          <a:ln/>
-        </p:spPr>
-        <p:txBody>
-          <a:bodyPr wrap="square" lIns="0" tIns="0" rIns="0" bIns="0" rtlCol="0" anchor="t"/>
-          <a:lstStyle/>
-          <a:p>
-            <a:pPr algn="l" indent="0" marL="0">
-              <a:spcAft>
-                <a:spcPts val="800"/>
-              </a:spcAft>
-              <a:buNone/>
-            </a:pPr>
-            <a:r>
-              <a:rPr lang="en-US" sz="4000" b="1" dirty="0">
-                <a:solidFill>
-                  <a:srgbClr val="111111"/>
-                </a:solidFill>
-                <a:latin typeface="Times New Roman" pitchFamily="34" charset="0"/>
-                <a:ea typeface="Times New Roman" pitchFamily="34" charset="-122"/>
-                <a:cs typeface="Times New Roman" pitchFamily="34" charset="-120"/>
-              </a:rPr>
-              <a:t>Example: </a:t>
-            </a:r>
-            <a:pPr algn="l" indent="0" marL="0">
-              <a:spcAft>
-                <a:spcPts val="800"/>
-              </a:spcAft>
-              <a:buNone/>
-            </a:pPr>
-            <a:r>
-              <a:rPr lang="en-US" sz="4000" dirty="0">
-                <a:solidFill>
-                  <a:srgbClr val="111111"/>
-                </a:solidFill>
-                <a:latin typeface="Times New Roman" pitchFamily="34" charset="0"/>
-                <a:ea typeface="Times New Roman" pitchFamily="34" charset="-122"/>
-                <a:cs typeface="Times New Roman" pitchFamily="34" charset="-120"/>
-              </a:rPr>
-              <a:t>A station with SD = 10.05 and mean = 13 has CV = 10.05 ÷ 13 × 100 ≈ 77.3 %.</a:t>
-            </a:r>
-            <a:endParaRPr lang="en-US" sz="4000" dirty="0"/>
+              <a:t>Illustration: the coefficient of variation</a:t>
+            </a:r>
+            <a:endParaRPr lang="en-US" sz="1600" dirty="0"/>
           </a:p>
         </p:txBody>
       </p:sp>
@@ -17805,7 +17664,7 @@
         <p:spPr>
           <a:xfrm>
             <a:off x="365760" y="1783080"/>
-            <a:ext cx="4846320" cy="4617720"/>
+            <a:ext cx="6035040" cy="4617720"/>
           </a:xfrm>
           <a:prstGeom prst="rect">
             <a:avLst/>
@@ -17849,7 +17708,7 @@
                 <a:ea typeface="Times New Roman" pitchFamily="34" charset="-122"/>
                 <a:cs typeface="Times New Roman" pitchFamily="34" charset="-120"/>
               </a:rPr>
-              <a:t>A high CV shows very variable data, like the monthly rainfall of Garoua; a low CV shows regular data.</a:t>
+              <a:t>A high CV shows very variable data, like the monthly rainfall of Garoua, which is very high in August and nil in January. A low CV shows regular data.</a:t>
             </a:r>
             <a:endParaRPr lang="en-US" sz="3600" dirty="0"/>
           </a:p>
@@ -17871,8 +17730,8 @@
         </p:blipFill>
         <p:spPr>
           <a:xfrm>
-            <a:off x="5349240" y="2461422"/>
-            <a:ext cx="6659575" cy="2913564"/>
+            <a:off x="6537960" y="2721454"/>
+            <a:ext cx="5470855" cy="2393499"/>
           </a:xfrm>
           <a:prstGeom prst="rect">
             <a:avLst/>
@@ -17887,8 +17746,8 @@
         </p:nvSpPr>
         <p:spPr>
           <a:xfrm>
-            <a:off x="5349240" y="6089904"/>
-            <a:ext cx="6659575" cy="347472"/>
+            <a:off x="6537960" y="6089904"/>
+            <a:ext cx="5470855" cy="347472"/>
           </a:xfrm>
           <a:prstGeom prst="rect">
             <a:avLst/>
@@ -18148,7 +18007,7 @@
                 <a:ea typeface="Times New Roman" pitchFamily="34" charset="-122"/>
                 <a:cs typeface="Times New Roman" pitchFamily="34" charset="-120"/>
               </a:rPr>
-              <a:t>It compares the variability of data with different means or units, such as rainfall of Garoua and Douala.</a:t>
+              <a:t>The CV compares the variability of data sets with different means or units. For example, it shows whether the rainfall of Garoua is more variable than that of Douala.</a:t>
             </a:r>
             <a:endParaRPr lang="en-US" sz="4000" dirty="0"/>
           </a:p>

--- a/lecons/USA/Practical Geography/13_USA_PRA_QT03b_Measures_of_Dispersion.pptx
+++ b/lecons/USA/Practical Geography/13_USA_PRA_QT03b_Measures_of_Dispersion.pptx
@@ -65,9 +65,10 @@
     <p:sldId id="313" r:id="rId59"/>
     <p:sldId id="314" r:id="rId60"/>
     <p:sldId id="315" r:id="rId61"/>
+    <p:sldId id="316" r:id="rId62"/>
   </p:sldIdLst>
   <p:notesMasterIdLst>
-    <p:notesMasterId r:id="rId62"/>
+    <p:notesMasterId r:id="rId63"/>
   </p:notesMasterIdLst>
   <p:sldSz cx="12192000" cy="6858000"/>
   <p:notesSz cx="6858000" cy="12192000"/>
@@ -4081,7 +4082,7 @@
           <a:p>
             <a:r>
               <a:rPr lang="en-US" dirty="0"/>
-              <a:t>Let us copy The Coefficient of Variation. The coefficient of variation is calculated and interpreted as follows. Copy the point on Formula and example on the left, then draw the diagram on the right: the coefficient of variation. Give it a title and label it clearly.</a:t>
+              <a:t>Let us copy The Coefficient of Variation. The coefficient of variation is calculated and interpreted as follows. Copy the point on Formula on the left, then draw the diagram on the right: the coefficient of variation. Give it a title and label it clearly.</a:t>
             </a:r>
             <a:endParaRPr lang="en-US" dirty="0"/>
           </a:p>
@@ -4169,7 +4170,7 @@
           <a:p>
             <a:r>
               <a:rPr lang="en-US" dirty="0"/>
-              <a:t>Copy the point on Interpretation on the left, then draw the diagram on the right: the climate of Garoua. Give it a title and label it clearly.</a:t>
+              <a:t>We continue with The Coefficient of Variation. Copy the point on Example: write the key term first, then its explanation.</a:t>
             </a:r>
             <a:endParaRPr lang="en-US" dirty="0"/>
           </a:p>
@@ -4257,7 +4258,7 @@
           <a:p>
             <a:r>
               <a:rPr lang="en-US" dirty="0"/>
-              <a:t>We continue with The Coefficient of Variation. Copy the point on Use: write the key term first, then its explanation.</a:t>
+              <a:t>Copy the point on Interpretation on the left, then draw the diagram on the right: the climate of Garoua. Give it a title and label it clearly.</a:t>
             </a:r>
             <a:endParaRPr lang="en-US" dirty="0"/>
           </a:p>
@@ -4345,7 +4346,7 @@
           <a:p>
             <a:r>
               <a:rPr lang="en-US" dirty="0"/>
-              <a:t>Now let us check what you have understood. Question 1: Calculate the SD of 2, 4, 4, 4, 5, 5, 7, 9. Answer in your exercise book.</a:t>
+              <a:t>We continue with The Coefficient of Variation. Copy the point on Use: write the key term first, then its explanation.</a:t>
             </a:r>
             <a:endParaRPr lang="en-US" dirty="0"/>
           </a:p>
@@ -4521,7 +4522,7 @@
           <a:p>
             <a:r>
               <a:rPr lang="en-US" dirty="0"/>
-              <a:t>The expected answer is: mean = 40 ÷ 8 = 5; Σ(x − x̄)² = 32; variance = 4; SD = 2. If you got it right, well done.</a:t>
+              <a:t>Now let us check what you have understood. Question 1: Calculate the SD of 2, 4, 4, 4, 5, 5, 7, 9. Answer in your exercise book.</a:t>
             </a:r>
             <a:endParaRPr lang="en-US" dirty="0"/>
           </a:p>
@@ -4609,7 +4610,7 @@
           <a:p>
             <a:r>
               <a:rPr lang="en-US" dirty="0"/>
-              <a:t>Now let us check what you have understood. Question 2: Why is the CV useful when comparing two stations? Answer in your exercise book.</a:t>
+              <a:t>The expected answer is: mean = 40 ÷ 8 = 5; Σ(x − x̄)² = 32; variance = 4; SD = 2. If you got it right, well done.</a:t>
             </a:r>
             <a:endParaRPr lang="en-US" dirty="0"/>
           </a:p>
@@ -4697,7 +4698,7 @@
           <a:p>
             <a:r>
               <a:rPr lang="en-US" dirty="0"/>
-              <a:t>The expected answer is: it expresses the spread relative to the mean, so stations with different means can be compared. If you got it right, well done.</a:t>
+              <a:t>Now let us check what you have understood. Question 2: Why is the CV useful when comparing two stations? Answer in your exercise book.</a:t>
             </a:r>
             <a:endParaRPr lang="en-US" dirty="0"/>
           </a:p>
@@ -4785,7 +4786,7 @@
           <a:p>
             <a:r>
               <a:rPr lang="en-US" dirty="0"/>
-              <a:t>For those who need more practice, fill in the blanks in your exercise book. The answers are: number 1, root; number 2, squared; number 3, mean.</a:t>
+              <a:t>The expected answer is: it expresses the spread relative to the mean, so stations with different means can be compared. If you got it right, well done.</a:t>
             </a:r>
             <a:endParaRPr lang="en-US" dirty="0"/>
           </a:p>
@@ -4873,7 +4874,7 @@
           <a:p>
             <a:r>
               <a:rPr lang="en-US" dirty="0"/>
-              <a:t>For your homework: Rank these values from highest to lowest: 12, 30, 25, 18. We shall correct it at the beginning of our next lesson.</a:t>
+              <a:t>For those who need more practice, fill in the blanks in your exercise book. The answers are: number 1, root; number 2, squared; number 3, mean.</a:t>
             </a:r>
             <a:endParaRPr lang="en-US" dirty="0"/>
           </a:p>
@@ -4961,7 +4962,7 @@
           <a:p>
             <a:r>
               <a:rPr lang="en-US" dirty="0"/>
-              <a:t>Our next lesson will be on Quantitative Techniques 3 (Part 3): Measures of Association: Spearman's Rank Correlation. Thank you for your attention, and see you next time.</a:t>
+              <a:t>For your homework: Rank these values from highest to lowest: 12, 30, 25, 18. We shall correct it at the beginning of our next lesson.</a:t>
             </a:r>
             <a:endParaRPr lang="en-US" dirty="0"/>
           </a:p>
@@ -5049,7 +5050,7 @@
           <a:p>
             <a:r>
               <a:rPr lang="en-US" dirty="0"/>
-              <a:t>Let us play the bilingual game. I say a word in English, and you give me the French word. Then we do the reverse.</a:t>
+              <a:t>Our next lesson will be on Quantitative Techniques 3 (Part 3): Measures of Association: Spearman's Rank Correlation. Thank you for your attention, and see you next time.</a:t>
             </a:r>
             <a:endParaRPr lang="en-US" dirty="0"/>
           </a:p>
@@ -5137,7 +5138,7 @@
           <a:p>
             <a:r>
               <a:rPr lang="en-US" dirty="0"/>
-              <a:t>I record this information in the official logbook of the class after the lesson.</a:t>
+              <a:t>Let us play the bilingual game. I say a word in English, and you give me the French word. Then we do the reverse.</a:t>
             </a:r>
             <a:endParaRPr lang="en-US" dirty="0"/>
           </a:p>
@@ -5225,7 +5226,7 @@
           <a:p>
             <a:r>
               <a:rPr lang="en-US" dirty="0"/>
-              <a:t>I complete the second page of the logbook: the matter taught, the evaluation, the homework and the attendance.</a:t>
+              <a:t>I record this information in the official logbook of the class after the lesson.</a:t>
             </a:r>
             <a:endParaRPr lang="en-US" dirty="0"/>
           </a:p>
@@ -5313,7 +5314,7 @@
           <a:p>
             <a:r>
               <a:rPr lang="en-US" dirty="0"/>
-              <a:t>This slide is for me, the teacher: it gives the timing of the lesson and what to do if the projector is not available.</a:t>
+              <a:t>I complete the second page of the logbook: the matter taught, the evaluation, the homework and the attendance.</a:t>
             </a:r>
             <a:endParaRPr lang="en-US" dirty="0"/>
           </a:p>
@@ -5489,7 +5490,7 @@
           <a:p>
             <a:r>
               <a:rPr lang="en-US" dirty="0"/>
-              <a:t>These are the references and picture credits used to prepare this lesson.</a:t>
+              <a:t>This slide is for me, the teacher: it gives the timing of the lesson and what to do if the projector is not available.</a:t>
             </a:r>
             <a:endParaRPr lang="en-US" dirty="0"/>
           </a:p>
@@ -5513,6 +5514,94 @@
             <a:fld id="{F7021451-1387-4CA6-816F-3879F97B5CBC}" type="slidenum">
               <a:rPr lang="en-US"/>
               <a:t>60</a:t>
+            </a:fld>
+            <a:endParaRPr lang="en-US"/>
+          </a:p>
+        </p:txBody>
+      </p:sp>
+    </p:spTree>
+    <p:extLst>
+      <p:ext uri="{BB962C8B-B14F-4D97-AF65-F5344CB8AC3E}">
+        <p14:creationId xmlns:p14="http://schemas.microsoft.com/office/powerpoint/2010/main" val="1024086991"/>
+      </p:ext>
+    </p:extLst>
+  </p:cSld>
+  <p:clrMapOvr>
+    <a:masterClrMapping/>
+  </p:clrMapOvr>
+</p:notes>
+</file>
+
+<file path=ppt/notesSlides/notesSlide61.xml><?xml version="1.0" encoding="utf-8"?>
+<p:notes xmlns:a="http://schemas.openxmlformats.org/drawingml/2006/main" xmlns:r="http://schemas.openxmlformats.org/officeDocument/2006/relationships" xmlns:p="http://schemas.openxmlformats.org/presentationml/2006/main">
+  <p:cSld>
+    <p:spTree>
+      <p:nvGrpSpPr>
+        <p:cNvPr id="1" name=""/>
+        <p:cNvGrpSpPr/>
+        <p:nvPr/>
+      </p:nvGrpSpPr>
+      <p:grpSpPr>
+        <a:xfrm>
+          <a:off x="0" y="0"/>
+          <a:ext cx="0" cy="0"/>
+          <a:chOff x="0" y="0"/>
+          <a:chExt cx="0" cy="0"/>
+        </a:xfrm>
+      </p:grpSpPr>
+      <p:sp>
+        <p:nvSpPr>
+          <p:cNvPr id="2" name="Slide Image Placeholder 1"/>
+          <p:cNvSpPr>
+            <a:spLocks noGrp="1" noRot="1" noChangeAspect="1"/>
+          </p:cNvSpPr>
+          <p:nvPr>
+            <p:ph type="sldImg"/>
+          </p:nvPr>
+        </p:nvSpPr>
+        <p:spPr/>
+      </p:sp>
+      <p:sp>
+        <p:nvSpPr>
+          <p:cNvPr id="3" name="Notes Placeholder 2"/>
+          <p:cNvSpPr>
+            <a:spLocks noGrp="1"/>
+          </p:cNvSpPr>
+          <p:nvPr>
+            <p:ph type="body" idx="1"/>
+          </p:nvPr>
+        </p:nvSpPr>
+        <p:spPr/>
+        <p:txBody>
+          <a:bodyPr/>
+          <a:lstStyle/>
+          <a:p>
+            <a:r>
+              <a:rPr lang="en-US" dirty="0"/>
+              <a:t>These are the references and picture credits used to prepare this lesson.</a:t>
+            </a:r>
+            <a:endParaRPr lang="en-US" dirty="0"/>
+          </a:p>
+        </p:txBody>
+      </p:sp>
+      <p:sp>
+        <p:nvSpPr>
+          <p:cNvPr id="4" name="Slide Number Placeholder 3"/>
+          <p:cNvSpPr>
+            <a:spLocks noGrp="1"/>
+          </p:cNvSpPr>
+          <p:nvPr>
+            <p:ph type="sldNum" sz="quarter" idx="10"/>
+          </p:nvPr>
+        </p:nvSpPr>
+        <p:spPr/>
+        <p:txBody>
+          <a:bodyPr/>
+          <a:lstStyle/>
+          <a:p>
+            <a:fld id="{F7021451-1387-4CA6-816F-3879F97B5CBC}" type="slidenum">
+              <a:rPr lang="en-US"/>
+              <a:t>61</a:t>
             </a:fld>
             <a:endParaRPr lang="en-US"/>
           </a:p>
@@ -17416,7 +17505,7 @@
                 <a:ea typeface="Times New Roman" pitchFamily="34" charset="-122"/>
                 <a:cs typeface="Times New Roman" pitchFamily="34" charset="-120"/>
               </a:rPr>
-              <a:t>Formula and example: </a:t>
+              <a:t>Formula: </a:t>
             </a:r>
             <a:pPr algn="l" indent="0" marL="0">
               <a:spcAft>
@@ -17433,7 +17522,7 @@
                 <a:ea typeface="Times New Roman" pitchFamily="34" charset="-122"/>
                 <a:cs typeface="Times New Roman" pitchFamily="34" charset="-120"/>
               </a:rPr>
-              <a:t>CV = SD ÷ mean × 100, in %. A station with an SD of 10.05 and a mean of 13 has a CV of 10.05 ÷ 13 × 100 ≈ 77.3 %.</a:t>
+              <a:t>CV = SD ÷ mean × 100, in %. It expresses the standard deviation as a percentage of the mean.</a:t>
             </a:r>
             <a:endParaRPr lang="en-US" sz="3600" dirty="0"/>
           </a:p>
@@ -17614,109 +17703,9 @@
           </a:p>
         </p:txBody>
       </p:sp>
-      <p:sp>
-        <p:nvSpPr>
-          <p:cNvPr id="3" name="Text 1"/>
-          <p:cNvSpPr/>
-          <p:nvPr/>
-        </p:nvSpPr>
-        <p:spPr>
-          <a:xfrm>
-            <a:off x="365760" y="1005840"/>
-            <a:ext cx="11460175" cy="731520"/>
-          </a:xfrm>
-          <a:prstGeom prst="rect">
-            <a:avLst/>
-          </a:prstGeom>
-          <a:noFill/>
-          <a:ln/>
-        </p:spPr>
-        <p:txBody>
-          <a:bodyPr wrap="square" lIns="0" tIns="0" rIns="0" bIns="0" rtlCol="0" anchor="ctr">
-            <a:normAutofit/>
-          </a:bodyPr>
-          <a:lstStyle/>
-          <a:p>
-            <a:pPr algn="ctr" indent="0" marL="0">
-              <a:buNone/>
-            </a:pPr>
-            <a:r>
-              <a:rPr lang="en-US" sz="3600" b="1" dirty="0">
-                <a:solidFill>
-                  <a:srgbClr val="990011"/>
-                </a:solidFill>
-                <a:latin typeface="Times New Roman" pitchFamily="34" charset="0"/>
-                <a:ea typeface="Times New Roman" pitchFamily="34" charset="-122"/>
-                <a:cs typeface="Times New Roman" pitchFamily="34" charset="-120"/>
-              </a:rPr>
-              <a:t>3. The Coefficient of Variation</a:t>
-            </a:r>
-            <a:endParaRPr lang="en-US" sz="3600" dirty="0"/>
-          </a:p>
-        </p:txBody>
-      </p:sp>
-      <p:sp>
-        <p:nvSpPr>
-          <p:cNvPr id="4" name="Text 2"/>
-          <p:cNvSpPr/>
-          <p:nvPr/>
-        </p:nvSpPr>
-        <p:spPr>
-          <a:xfrm>
-            <a:off x="365760" y="1783080"/>
-            <a:ext cx="6035040" cy="4617720"/>
-          </a:xfrm>
-          <a:prstGeom prst="rect">
-            <a:avLst/>
-          </a:prstGeom>
-          <a:noFill/>
-          <a:ln/>
-        </p:spPr>
-        <p:txBody>
-          <a:bodyPr wrap="square" lIns="0" tIns="0" rIns="0" bIns="0" rtlCol="0" anchor="t"/>
-          <a:lstStyle/>
-          <a:p>
-            <a:pPr algn="l" indent="0" marL="0">
-              <a:spcAft>
-                <a:spcPts val="800"/>
-              </a:spcAft>
-              <a:buNone/>
-            </a:pPr>
-            <a:r>
-              <a:rPr lang="en-US" sz="3600" b="1" dirty="0">
-                <a:solidFill>
-                  <a:srgbClr val="111111"/>
-                </a:solidFill>
-                <a:latin typeface="Times New Roman" pitchFamily="34" charset="0"/>
-                <a:ea typeface="Times New Roman" pitchFamily="34" charset="-122"/>
-                <a:cs typeface="Times New Roman" pitchFamily="34" charset="-120"/>
-              </a:rPr>
-              <a:t>Interpretation: </a:t>
-            </a:r>
-            <a:pPr algn="l" indent="0" marL="0">
-              <a:spcAft>
-                <a:spcPts val="800"/>
-              </a:spcAft>
-              <a:buNone/>
-            </a:pPr>
-            <a:r>
-              <a:rPr lang="en-US" sz="3600" dirty="0">
-                <a:solidFill>
-                  <a:srgbClr val="111111"/>
-                </a:solidFill>
-                <a:latin typeface="Times New Roman" pitchFamily="34" charset="0"/>
-                <a:ea typeface="Times New Roman" pitchFamily="34" charset="-122"/>
-                <a:cs typeface="Times New Roman" pitchFamily="34" charset="-120"/>
-              </a:rPr>
-              <a:t>A high CV shows very variable data, like the monthly rainfall of Garoua, which is very high in August and nil in January. A low CV shows regular data.</a:t>
-            </a:r>
-            <a:endParaRPr lang="en-US" sz="3600" dirty="0"/>
-          </a:p>
-        </p:txBody>
-      </p:sp>
       <p:pic>
         <p:nvPicPr>
-          <p:cNvPr id="5" name="Image 0" descr="/home/claude/f4/img/v2/garoua_climate_big.png">    </p:cNvPr>
+          <p:cNvPr id="3" name="Image 0" descr="/home/claude/f4/img/minesec_sheet.png">    </p:cNvPr>
           <p:cNvPicPr>
             <a:picLocks noChangeAspect="1"/>
           </p:cNvPicPr>
@@ -17730,8 +17719,8 @@
         </p:blipFill>
         <p:spPr>
           <a:xfrm>
-            <a:off x="6537960" y="2721454"/>
-            <a:ext cx="5470855" cy="2393499"/>
+            <a:off x="0" y="658368"/>
+            <a:ext cx="5120640" cy="5833872"/>
           </a:xfrm>
           <a:prstGeom prst="rect">
             <a:avLst/>
@@ -17740,14 +17729,14 @@
       </p:pic>
       <p:sp>
         <p:nvSpPr>
-          <p:cNvPr id="6" name="Text 3"/>
+          <p:cNvPr id="4" name="Text 1"/>
           <p:cNvSpPr/>
           <p:nvPr/>
         </p:nvSpPr>
         <p:spPr>
           <a:xfrm>
-            <a:off x="6537960" y="6089904"/>
-            <a:ext cx="5470855" cy="347472"/>
+            <a:off x="5349240" y="1005840"/>
+            <a:ext cx="6522415" cy="731520"/>
           </a:xfrm>
           <a:prstGeom prst="rect">
             <a:avLst/>
@@ -17756,24 +17745,85 @@
           <a:ln/>
         </p:spPr>
         <p:txBody>
-          <a:bodyPr wrap="square" lIns="0" tIns="0" rIns="0" bIns="0" rtlCol="0" anchor="ctr"/>
+          <a:bodyPr wrap="square" lIns="0" tIns="0" rIns="0" bIns="0" rtlCol="0" anchor="ctr">
+            <a:normAutofit/>
+          </a:bodyPr>
           <a:lstStyle/>
           <a:p>
             <a:pPr algn="ctr" indent="0" marL="0">
               <a:buNone/>
             </a:pPr>
             <a:r>
-              <a:rPr lang="en-US" sz="1600" i="1" dirty="0">
-                <a:solidFill>
-                  <a:srgbClr val="555555"/>
+              <a:rPr lang="en-US" sz="3600" b="1" dirty="0">
+                <a:solidFill>
+                  <a:srgbClr val="990011"/>
                 </a:solidFill>
                 <a:latin typeface="Times New Roman" pitchFamily="34" charset="0"/>
                 <a:ea typeface="Times New Roman" pitchFamily="34" charset="-122"/>
                 <a:cs typeface="Times New Roman" pitchFamily="34" charset="-120"/>
               </a:rPr>
-              <a:t>Illustration: the climate of Garoua</a:t>
-            </a:r>
-            <a:endParaRPr lang="en-US" sz="1600" dirty="0"/>
+              <a:t>3. The Coefficient of Variation</a:t>
+            </a:r>
+            <a:endParaRPr lang="en-US" sz="3600" dirty="0"/>
+          </a:p>
+        </p:txBody>
+      </p:sp>
+      <p:sp>
+        <p:nvSpPr>
+          <p:cNvPr id="5" name="Text 2"/>
+          <p:cNvSpPr/>
+          <p:nvPr/>
+        </p:nvSpPr>
+        <p:spPr>
+          <a:xfrm>
+            <a:off x="5349240" y="1783080"/>
+            <a:ext cx="6522415" cy="4663440"/>
+          </a:xfrm>
+          <a:prstGeom prst="rect">
+            <a:avLst/>
+          </a:prstGeom>
+          <a:noFill/>
+          <a:ln/>
+        </p:spPr>
+        <p:txBody>
+          <a:bodyPr wrap="square" lIns="0" tIns="0" rIns="0" bIns="0" rtlCol="0" anchor="t"/>
+          <a:lstStyle/>
+          <a:p>
+            <a:pPr algn="l" indent="0" marL="0">
+              <a:spcAft>
+                <a:spcPts val="800"/>
+              </a:spcAft>
+              <a:buNone/>
+            </a:pPr>
+            <a:r>
+              <a:rPr lang="en-US" sz="4000" b="1" dirty="0">
+                <a:solidFill>
+                  <a:srgbClr val="111111"/>
+                </a:solidFill>
+                <a:latin typeface="Times New Roman" pitchFamily="34" charset="0"/>
+                <a:ea typeface="Times New Roman" pitchFamily="34" charset="-122"/>
+                <a:cs typeface="Times New Roman" pitchFamily="34" charset="-120"/>
+              </a:rPr>
+              <a:t>Example: </a:t>
+            </a:r>
+            <a:pPr algn="l" indent="0" marL="0">
+              <a:spcAft>
+                <a:spcPts val="800"/>
+              </a:spcAft>
+              <a:buNone/>
+            </a:pPr>
+            <a:r>
+              <a:rPr lang="en-US" sz="4000" dirty="0">
+                <a:solidFill>
+                  <a:srgbClr val="111111"/>
+                </a:solidFill>
+                <a:latin typeface="Times New Roman" pitchFamily="34" charset="0"/>
+                <a:ea typeface="Times New Roman" pitchFamily="34" charset="-122"/>
+                <a:cs typeface="Times New Roman" pitchFamily="34" charset="-120"/>
+              </a:rPr>
+              <a:t>A station has a standard deviation of 10.05 and a mean of 13. Its CV is 10.05 ÷ 13 × 100 ≈ 77.3 %.</a:t>
+            </a:r>
+            <a:endParaRPr lang="en-US" sz="4000" dirty="0"/>
           </a:p>
         </p:txBody>
       </p:sp>
@@ -17889,9 +17939,109 @@
           </a:p>
         </p:txBody>
       </p:sp>
+      <p:sp>
+        <p:nvSpPr>
+          <p:cNvPr id="3" name="Text 1"/>
+          <p:cNvSpPr/>
+          <p:nvPr/>
+        </p:nvSpPr>
+        <p:spPr>
+          <a:xfrm>
+            <a:off x="365760" y="1005840"/>
+            <a:ext cx="11460175" cy="731520"/>
+          </a:xfrm>
+          <a:prstGeom prst="rect">
+            <a:avLst/>
+          </a:prstGeom>
+          <a:noFill/>
+          <a:ln/>
+        </p:spPr>
+        <p:txBody>
+          <a:bodyPr wrap="square" lIns="0" tIns="0" rIns="0" bIns="0" rtlCol="0" anchor="ctr">
+            <a:normAutofit/>
+          </a:bodyPr>
+          <a:lstStyle/>
+          <a:p>
+            <a:pPr algn="ctr" indent="0" marL="0">
+              <a:buNone/>
+            </a:pPr>
+            <a:r>
+              <a:rPr lang="en-US" sz="3600" b="1" dirty="0">
+                <a:solidFill>
+                  <a:srgbClr val="990011"/>
+                </a:solidFill>
+                <a:latin typeface="Times New Roman" pitchFamily="34" charset="0"/>
+                <a:ea typeface="Times New Roman" pitchFamily="34" charset="-122"/>
+                <a:cs typeface="Times New Roman" pitchFamily="34" charset="-120"/>
+              </a:rPr>
+              <a:t>3. The Coefficient of Variation</a:t>
+            </a:r>
+            <a:endParaRPr lang="en-US" sz="3600" dirty="0"/>
+          </a:p>
+        </p:txBody>
+      </p:sp>
+      <p:sp>
+        <p:nvSpPr>
+          <p:cNvPr id="4" name="Text 2"/>
+          <p:cNvSpPr/>
+          <p:nvPr/>
+        </p:nvSpPr>
+        <p:spPr>
+          <a:xfrm>
+            <a:off x="365760" y="1783080"/>
+            <a:ext cx="6035040" cy="4617720"/>
+          </a:xfrm>
+          <a:prstGeom prst="rect">
+            <a:avLst/>
+          </a:prstGeom>
+          <a:noFill/>
+          <a:ln/>
+        </p:spPr>
+        <p:txBody>
+          <a:bodyPr wrap="square" lIns="0" tIns="0" rIns="0" bIns="0" rtlCol="0" anchor="t"/>
+          <a:lstStyle/>
+          <a:p>
+            <a:pPr algn="l" indent="0" marL="0">
+              <a:spcAft>
+                <a:spcPts val="800"/>
+              </a:spcAft>
+              <a:buNone/>
+            </a:pPr>
+            <a:r>
+              <a:rPr lang="en-US" sz="3600" b="1" dirty="0">
+                <a:solidFill>
+                  <a:srgbClr val="111111"/>
+                </a:solidFill>
+                <a:latin typeface="Times New Roman" pitchFamily="34" charset="0"/>
+                <a:ea typeface="Times New Roman" pitchFamily="34" charset="-122"/>
+                <a:cs typeface="Times New Roman" pitchFamily="34" charset="-120"/>
+              </a:rPr>
+              <a:t>Interpretation: </a:t>
+            </a:r>
+            <a:pPr algn="l" indent="0" marL="0">
+              <a:spcAft>
+                <a:spcPts val="800"/>
+              </a:spcAft>
+              <a:buNone/>
+            </a:pPr>
+            <a:r>
+              <a:rPr lang="en-US" sz="3600" dirty="0">
+                <a:solidFill>
+                  <a:srgbClr val="111111"/>
+                </a:solidFill>
+                <a:latin typeface="Times New Roman" pitchFamily="34" charset="0"/>
+                <a:ea typeface="Times New Roman" pitchFamily="34" charset="-122"/>
+                <a:cs typeface="Times New Roman" pitchFamily="34" charset="-120"/>
+              </a:rPr>
+              <a:t>A high CV shows very variable data, like the monthly rainfall of Garoua, which is very high in August and nil in January. A low CV shows regular data.</a:t>
+            </a:r>
+            <a:endParaRPr lang="en-US" sz="3600" dirty="0"/>
+          </a:p>
+        </p:txBody>
+      </p:sp>
       <p:pic>
         <p:nvPicPr>
-          <p:cNvPr id="3" name="Image 0" descr="/home/claude/f4/img/minesec_sheet.png">    </p:cNvPr>
+          <p:cNvPr id="5" name="Image 0" descr="/home/claude/f4/img/v2/garoua_climate_big.png">    </p:cNvPr>
           <p:cNvPicPr>
             <a:picLocks noChangeAspect="1"/>
           </p:cNvPicPr>
@@ -17905,8 +18055,8 @@
         </p:blipFill>
         <p:spPr>
           <a:xfrm>
-            <a:off x="0" y="658368"/>
-            <a:ext cx="5120640" cy="5833872"/>
+            <a:off x="6537960" y="2721454"/>
+            <a:ext cx="5470855" cy="2393499"/>
           </a:xfrm>
           <a:prstGeom prst="rect">
             <a:avLst/>
@@ -17915,14 +18065,14 @@
       </p:pic>
       <p:sp>
         <p:nvSpPr>
-          <p:cNvPr id="4" name="Text 1"/>
+          <p:cNvPr id="6" name="Text 3"/>
           <p:cNvSpPr/>
           <p:nvPr/>
         </p:nvSpPr>
         <p:spPr>
           <a:xfrm>
-            <a:off x="5349240" y="1005840"/>
-            <a:ext cx="6522415" cy="731520"/>
+            <a:off x="6537960" y="6089904"/>
+            <a:ext cx="5470855" cy="347472"/>
           </a:xfrm>
           <a:prstGeom prst="rect">
             <a:avLst/>
@@ -17931,85 +18081,24 @@
           <a:ln/>
         </p:spPr>
         <p:txBody>
-          <a:bodyPr wrap="square" lIns="0" tIns="0" rIns="0" bIns="0" rtlCol="0" anchor="ctr">
-            <a:normAutofit/>
-          </a:bodyPr>
+          <a:bodyPr wrap="square" lIns="0" tIns="0" rIns="0" bIns="0" rtlCol="0" anchor="ctr"/>
           <a:lstStyle/>
           <a:p>
             <a:pPr algn="ctr" indent="0" marL="0">
               <a:buNone/>
             </a:pPr>
             <a:r>
-              <a:rPr lang="en-US" sz="3600" b="1" dirty="0">
-                <a:solidFill>
-                  <a:srgbClr val="990011"/>
+              <a:rPr lang="en-US" sz="1600" i="1" dirty="0">
+                <a:solidFill>
+                  <a:srgbClr val="555555"/>
                 </a:solidFill>
                 <a:latin typeface="Times New Roman" pitchFamily="34" charset="0"/>
                 <a:ea typeface="Times New Roman" pitchFamily="34" charset="-122"/>
                 <a:cs typeface="Times New Roman" pitchFamily="34" charset="-120"/>
               </a:rPr>
-              <a:t>3. The Coefficient of Variation</a:t>
-            </a:r>
-            <a:endParaRPr lang="en-US" sz="3600" dirty="0"/>
-          </a:p>
-        </p:txBody>
-      </p:sp>
-      <p:sp>
-        <p:nvSpPr>
-          <p:cNvPr id="5" name="Text 2"/>
-          <p:cNvSpPr/>
-          <p:nvPr/>
-        </p:nvSpPr>
-        <p:spPr>
-          <a:xfrm>
-            <a:off x="5349240" y="1783080"/>
-            <a:ext cx="6522415" cy="4663440"/>
-          </a:xfrm>
-          <a:prstGeom prst="rect">
-            <a:avLst/>
-          </a:prstGeom>
-          <a:noFill/>
-          <a:ln/>
-        </p:spPr>
-        <p:txBody>
-          <a:bodyPr wrap="square" lIns="0" tIns="0" rIns="0" bIns="0" rtlCol="0" anchor="t"/>
-          <a:lstStyle/>
-          <a:p>
-            <a:pPr algn="l" indent="0" marL="0">
-              <a:spcAft>
-                <a:spcPts val="800"/>
-              </a:spcAft>
-              <a:buNone/>
-            </a:pPr>
-            <a:r>
-              <a:rPr lang="en-US" sz="4000" b="1" dirty="0">
-                <a:solidFill>
-                  <a:srgbClr val="111111"/>
-                </a:solidFill>
-                <a:latin typeface="Times New Roman" pitchFamily="34" charset="0"/>
-                <a:ea typeface="Times New Roman" pitchFamily="34" charset="-122"/>
-                <a:cs typeface="Times New Roman" pitchFamily="34" charset="-120"/>
-              </a:rPr>
-              <a:t>Use: </a:t>
-            </a:r>
-            <a:pPr algn="l" indent="0" marL="0">
-              <a:spcAft>
-                <a:spcPts val="800"/>
-              </a:spcAft>
-              <a:buNone/>
-            </a:pPr>
-            <a:r>
-              <a:rPr lang="en-US" sz="4000" dirty="0">
-                <a:solidFill>
-                  <a:srgbClr val="111111"/>
-                </a:solidFill>
-                <a:latin typeface="Times New Roman" pitchFamily="34" charset="0"/>
-                <a:ea typeface="Times New Roman" pitchFamily="34" charset="-122"/>
-                <a:cs typeface="Times New Roman" pitchFamily="34" charset="-120"/>
-              </a:rPr>
-              <a:t>The CV compares the variability of data sets with different means or units. For example, it shows whether the rainfall of Garoua is more variable than that of Douala.</a:t>
-            </a:r>
-            <a:endParaRPr lang="en-US" sz="4000" dirty="0"/>
+              <a:t>Illustration: the climate of Garoua</a:t>
+            </a:r>
+            <a:endParaRPr lang="en-US" sz="1600" dirty="0"/>
           </a:p>
         </p:txBody>
       </p:sp>
@@ -18119,7 +18208,7 @@
                 <a:ea typeface="Calibri" pitchFamily="34" charset="-122"/>
                 <a:cs typeface="Calibri" pitchFamily="34" charset="-120"/>
               </a:rPr>
-              <a:t>FORMATIVE EVALUATION</a:t>
+              <a:t>BOARD SUMMARY</a:t>
             </a:r>
             <a:endParaRPr lang="en-US" sz="1400" dirty="0"/>
           </a:p>
@@ -18184,7 +18273,7 @@
                 <a:ea typeface="Times New Roman" pitchFamily="34" charset="-122"/>
                 <a:cs typeface="Times New Roman" pitchFamily="34" charset="-120"/>
               </a:rPr>
-              <a:t>Evaluation 1</a:t>
+              <a:t>3. The Coefficient of Variation</a:t>
             </a:r>
             <a:endParaRPr lang="en-US" sz="3600" dirty="0"/>
           </a:p>
@@ -18218,7 +18307,7 @@
               <a:buNone/>
             </a:pPr>
             <a:r>
-              <a:rPr lang="en-US" sz="4000" dirty="0">
+              <a:rPr lang="en-US" sz="4000" b="1" dirty="0">
                 <a:solidFill>
                   <a:srgbClr val="111111"/>
                 </a:solidFill>
@@ -18226,7 +18315,24 @@
                 <a:ea typeface="Times New Roman" pitchFamily="34" charset="-122"/>
                 <a:cs typeface="Times New Roman" pitchFamily="34" charset="-120"/>
               </a:rPr>
-              <a:t>Calculate the SD of 2, 4, 4, 4, 5, 5, 7, 9.</a:t>
+              <a:t>Use: </a:t>
+            </a:r>
+            <a:pPr algn="l" indent="0" marL="0">
+              <a:spcAft>
+                <a:spcPts val="800"/>
+              </a:spcAft>
+              <a:buNone/>
+            </a:pPr>
+            <a:r>
+              <a:rPr lang="en-US" sz="4000" dirty="0">
+                <a:solidFill>
+                  <a:srgbClr val="111111"/>
+                </a:solidFill>
+                <a:latin typeface="Times New Roman" pitchFamily="34" charset="0"/>
+                <a:ea typeface="Times New Roman" pitchFamily="34" charset="-122"/>
+                <a:cs typeface="Times New Roman" pitchFamily="34" charset="-120"/>
+              </a:rPr>
+              <a:t>The CV compares the variability of data sets with different means or units. For example, it shows whether the rainfall of Garoua is more variable than that of Douala.</a:t>
             </a:r>
             <a:endParaRPr lang="en-US" sz="4000" dirty="0"/>
           </a:p>
@@ -18622,7 +18728,7 @@
                 <a:ea typeface="Times New Roman" pitchFamily="34" charset="-122"/>
                 <a:cs typeface="Times New Roman" pitchFamily="34" charset="-120"/>
               </a:rPr>
-              <a:t>Expected Answer</a:t>
+              <a:t>Evaluation 1</a:t>
             </a:r>
             <a:endParaRPr lang="en-US" sz="3600" dirty="0"/>
           </a:p>
@@ -18664,7 +18770,7 @@
                 <a:ea typeface="Times New Roman" pitchFamily="34" charset="-122"/>
                 <a:cs typeface="Times New Roman" pitchFamily="34" charset="-120"/>
               </a:rPr>
-              <a:t>Mean = 40 ÷ 8 = 5; Σ(x − x̄)² = 32; variance = 4; SD = 2.</a:t>
+              <a:t>Calculate the SD of 2, 4, 4, 4, 5, 5, 7, 9.</a:t>
             </a:r>
             <a:endParaRPr lang="en-US" sz="4000" dirty="0"/>
           </a:p>
@@ -18841,7 +18947,7 @@
                 <a:ea typeface="Times New Roman" pitchFamily="34" charset="-122"/>
                 <a:cs typeface="Times New Roman" pitchFamily="34" charset="-120"/>
               </a:rPr>
-              <a:t>Evaluation 2</a:t>
+              <a:t>Expected Answer</a:t>
             </a:r>
             <a:endParaRPr lang="en-US" sz="3600" dirty="0"/>
           </a:p>
@@ -18883,7 +18989,7 @@
                 <a:ea typeface="Times New Roman" pitchFamily="34" charset="-122"/>
                 <a:cs typeface="Times New Roman" pitchFamily="34" charset="-120"/>
               </a:rPr>
-              <a:t>Why is the CV useful when comparing two stations?</a:t>
+              <a:t>Mean = 40 ÷ 8 = 5; Σ(x − x̄)² = 32; variance = 4; SD = 2.</a:t>
             </a:r>
             <a:endParaRPr lang="en-US" sz="4000" dirty="0"/>
           </a:p>
@@ -19060,7 +19166,7 @@
                 <a:ea typeface="Times New Roman" pitchFamily="34" charset="-122"/>
                 <a:cs typeface="Times New Roman" pitchFamily="34" charset="-120"/>
               </a:rPr>
-              <a:t>Expected Answer</a:t>
+              <a:t>Evaluation 2</a:t>
             </a:r>
             <a:endParaRPr lang="en-US" sz="3600" dirty="0"/>
           </a:p>
@@ -19102,7 +19208,7 @@
                 <a:ea typeface="Times New Roman" pitchFamily="34" charset="-122"/>
                 <a:cs typeface="Times New Roman" pitchFamily="34" charset="-120"/>
               </a:rPr>
-              <a:t>It expresses the spread relative to the mean, so stations with different means can be compared.</a:t>
+              <a:t>Why is the CV useful when comparing two stations?</a:t>
             </a:r>
             <a:endParaRPr lang="en-US" sz="4000" dirty="0"/>
           </a:p>
@@ -19214,7 +19320,7 @@
                 <a:ea typeface="Calibri" pitchFamily="34" charset="-122"/>
                 <a:cs typeface="Calibri" pitchFamily="34" charset="-120"/>
               </a:rPr>
-              <a:t>REMEDIATION</a:t>
+              <a:t>FORMATIVE EVALUATION</a:t>
             </a:r>
             <a:endParaRPr lang="en-US" sz="1400" dirty="0"/>
           </a:p>
@@ -19279,7 +19385,7 @@
                 <a:ea typeface="Times New Roman" pitchFamily="34" charset="-122"/>
                 <a:cs typeface="Times New Roman" pitchFamily="34" charset="-120"/>
               </a:rPr>
-              <a:t>Remediation</a:t>
+              <a:t>Expected Answer</a:t>
             </a:r>
             <a:endParaRPr lang="en-US" sz="3600" dirty="0"/>
           </a:p>
@@ -19313,7 +19419,7 @@
               <a:buNone/>
             </a:pPr>
             <a:r>
-              <a:rPr lang="en-US" sz="4000" b="1" dirty="0">
+              <a:rPr lang="en-US" sz="4000" dirty="0">
                 <a:solidFill>
                   <a:srgbClr val="111111"/>
                 </a:solidFill>
@@ -19321,73 +19427,7 @@
                 <a:ea typeface="Times New Roman" pitchFamily="34" charset="-122"/>
                 <a:cs typeface="Times New Roman" pitchFamily="34" charset="-120"/>
               </a:rPr>
-              <a:t>Fill in the blanks:</a:t>
-            </a:r>
-            <a:endParaRPr lang="en-US" sz="4000" dirty="0"/>
-          </a:p>
-          <a:p>
-            <a:pPr algn="l" marL="342900" indent="-342900">
-              <a:spcAft>
-                <a:spcPts val="800"/>
-              </a:spcAft>
-              <a:buSzPct val="100000"/>
-              <a:buFont typeface="+mj-lt"/>
-              <a:buAutoNum type="arabicPeriod" startAt="1"/>
-            </a:pPr>
-            <a:r>
-              <a:rPr lang="en-US" sz="4000" dirty="0">
-                <a:solidFill>
-                  <a:srgbClr val="111111"/>
-                </a:solidFill>
-                <a:latin typeface="Times New Roman" pitchFamily="34" charset="0"/>
-                <a:ea typeface="Times New Roman" pitchFamily="34" charset="-122"/>
-                <a:cs typeface="Times New Roman" pitchFamily="34" charset="-120"/>
-              </a:rPr>
-              <a:t>The SD is the square ______ of the variance.</a:t>
-            </a:r>
-            <a:endParaRPr lang="en-US" sz="4000" dirty="0"/>
-          </a:p>
-          <a:p>
-            <a:pPr algn="l" marL="342900" indent="-342900">
-              <a:spcAft>
-                <a:spcPts val="800"/>
-              </a:spcAft>
-              <a:buSzPct val="100000"/>
-              <a:buFont typeface="+mj-lt"/>
-              <a:buAutoNum type="arabicPeriod" startAt="1"/>
-            </a:pPr>
-            <a:r>
-              <a:rPr lang="en-US" sz="4000" dirty="0">
-                <a:solidFill>
-                  <a:srgbClr val="111111"/>
-                </a:solidFill>
-                <a:latin typeface="Times New Roman" pitchFamily="34" charset="0"/>
-                <a:ea typeface="Times New Roman" pitchFamily="34" charset="-122"/>
-                <a:cs typeface="Times New Roman" pitchFamily="34" charset="-120"/>
-              </a:rPr>
-              <a:t>Deviations are ______ to remove negative signs.</a:t>
-            </a:r>
-            <a:endParaRPr lang="en-US" sz="4000" dirty="0"/>
-          </a:p>
-          <a:p>
-            <a:pPr algn="l" marL="342900" indent="-342900">
-              <a:spcAft>
-                <a:spcPts val="800"/>
-              </a:spcAft>
-              <a:buSzPct val="100000"/>
-              <a:buFont typeface="+mj-lt"/>
-              <a:buAutoNum type="arabicPeriod" startAt="1"/>
-            </a:pPr>
-            <a:r>
-              <a:rPr lang="en-US" sz="4000" dirty="0">
-                <a:solidFill>
-                  <a:srgbClr val="111111"/>
-                </a:solidFill>
-                <a:latin typeface="Times New Roman" pitchFamily="34" charset="0"/>
-                <a:ea typeface="Times New Roman" pitchFamily="34" charset="-122"/>
-                <a:cs typeface="Times New Roman" pitchFamily="34" charset="-120"/>
-              </a:rPr>
-              <a:t>CV = SD ÷ ______ × 100.</a:t>
+              <a:t>It expresses the spread relative to the mean, so stations with different means can be compared.</a:t>
             </a:r>
             <a:endParaRPr lang="en-US" sz="4000" dirty="0"/>
           </a:p>
@@ -19499,7 +19539,7 @@
                 <a:ea typeface="Calibri" pitchFamily="34" charset="-122"/>
                 <a:cs typeface="Calibri" pitchFamily="34" charset="-120"/>
               </a:rPr>
-              <a:t>HOMEWORK</a:t>
+              <a:t>REMEDIATION</a:t>
             </a:r>
             <a:endParaRPr lang="en-US" sz="1400" dirty="0"/>
           </a:p>
@@ -19564,7 +19604,7 @@
                 <a:ea typeface="Times New Roman" pitchFamily="34" charset="-122"/>
                 <a:cs typeface="Times New Roman" pitchFamily="34" charset="-120"/>
               </a:rPr>
-              <a:t>Homework</a:t>
+              <a:t>Remediation</a:t>
             </a:r>
             <a:endParaRPr lang="en-US" sz="3600" dirty="0"/>
           </a:p>
@@ -19598,7 +19638,7 @@
               <a:buNone/>
             </a:pPr>
             <a:r>
-              <a:rPr lang="en-US" sz="4000" dirty="0">
+              <a:rPr lang="en-US" sz="4000" b="1" dirty="0">
                 <a:solidFill>
                   <a:srgbClr val="111111"/>
                 </a:solidFill>
@@ -19606,7 +19646,73 @@
                 <a:ea typeface="Times New Roman" pitchFamily="34" charset="-122"/>
                 <a:cs typeface="Times New Roman" pitchFamily="34" charset="-120"/>
               </a:rPr>
-              <a:t>Rank these values from highest to lowest: 12, 30, 25, 18.</a:t>
+              <a:t>Fill in the blanks:</a:t>
+            </a:r>
+            <a:endParaRPr lang="en-US" sz="4000" dirty="0"/>
+          </a:p>
+          <a:p>
+            <a:pPr algn="l" marL="342900" indent="-342900">
+              <a:spcAft>
+                <a:spcPts val="800"/>
+              </a:spcAft>
+              <a:buSzPct val="100000"/>
+              <a:buFont typeface="+mj-lt"/>
+              <a:buAutoNum type="arabicPeriod" startAt="1"/>
+            </a:pPr>
+            <a:r>
+              <a:rPr lang="en-US" sz="4000" dirty="0">
+                <a:solidFill>
+                  <a:srgbClr val="111111"/>
+                </a:solidFill>
+                <a:latin typeface="Times New Roman" pitchFamily="34" charset="0"/>
+                <a:ea typeface="Times New Roman" pitchFamily="34" charset="-122"/>
+                <a:cs typeface="Times New Roman" pitchFamily="34" charset="-120"/>
+              </a:rPr>
+              <a:t>The SD is the square ______ of the variance.</a:t>
+            </a:r>
+            <a:endParaRPr lang="en-US" sz="4000" dirty="0"/>
+          </a:p>
+          <a:p>
+            <a:pPr algn="l" marL="342900" indent="-342900">
+              <a:spcAft>
+                <a:spcPts val="800"/>
+              </a:spcAft>
+              <a:buSzPct val="100000"/>
+              <a:buFont typeface="+mj-lt"/>
+              <a:buAutoNum type="arabicPeriod" startAt="1"/>
+            </a:pPr>
+            <a:r>
+              <a:rPr lang="en-US" sz="4000" dirty="0">
+                <a:solidFill>
+                  <a:srgbClr val="111111"/>
+                </a:solidFill>
+                <a:latin typeface="Times New Roman" pitchFamily="34" charset="0"/>
+                <a:ea typeface="Times New Roman" pitchFamily="34" charset="-122"/>
+                <a:cs typeface="Times New Roman" pitchFamily="34" charset="-120"/>
+              </a:rPr>
+              <a:t>Deviations are ______ to remove negative signs.</a:t>
+            </a:r>
+            <a:endParaRPr lang="en-US" sz="4000" dirty="0"/>
+          </a:p>
+          <a:p>
+            <a:pPr algn="l" marL="342900" indent="-342900">
+              <a:spcAft>
+                <a:spcPts val="800"/>
+              </a:spcAft>
+              <a:buSzPct val="100000"/>
+              <a:buFont typeface="+mj-lt"/>
+              <a:buAutoNum type="arabicPeriod" startAt="1"/>
+            </a:pPr>
+            <a:r>
+              <a:rPr lang="en-US" sz="4000" dirty="0">
+                <a:solidFill>
+                  <a:srgbClr val="111111"/>
+                </a:solidFill>
+                <a:latin typeface="Times New Roman" pitchFamily="34" charset="0"/>
+                <a:ea typeface="Times New Roman" pitchFamily="34" charset="-122"/>
+                <a:cs typeface="Times New Roman" pitchFamily="34" charset="-120"/>
+              </a:rPr>
+              <a:t>CV = SD ÷ ______ × 100.</a:t>
             </a:r>
             <a:endParaRPr lang="en-US" sz="4000" dirty="0"/>
           </a:p>
@@ -19718,7 +19824,7 @@
                 <a:ea typeface="Calibri" pitchFamily="34" charset="-122"/>
                 <a:cs typeface="Calibri" pitchFamily="34" charset="-120"/>
               </a:rPr>
-              <a:t>NEXT LESSON</a:t>
+              <a:t>HOMEWORK</a:t>
             </a:r>
             <a:endParaRPr lang="en-US" sz="1400" dirty="0"/>
           </a:p>
@@ -19783,7 +19889,7 @@
                 <a:ea typeface="Times New Roman" pitchFamily="34" charset="-122"/>
                 <a:cs typeface="Times New Roman" pitchFamily="34" charset="-120"/>
               </a:rPr>
-              <a:t>Next Lesson</a:t>
+              <a:t>Homework</a:t>
             </a:r>
             <a:endParaRPr lang="en-US" sz="3600" dirty="0"/>
           </a:p>
@@ -19807,17 +19913,17 @@
           <a:ln/>
         </p:spPr>
         <p:txBody>
-          <a:bodyPr wrap="square" lIns="0" tIns="0" rIns="0" bIns="0" rtlCol="0" anchor="ctr"/>
-          <a:lstStyle/>
-          <a:p>
-            <a:pPr algn="ctr" indent="0" marL="0">
+          <a:bodyPr wrap="square" lIns="0" tIns="0" rIns="0" bIns="0" rtlCol="0" anchor="t"/>
+          <a:lstStyle/>
+          <a:p>
+            <a:pPr algn="l" indent="0" marL="0">
               <a:spcAft>
                 <a:spcPts val="800"/>
               </a:spcAft>
               <a:buNone/>
             </a:pPr>
             <a:r>
-              <a:rPr lang="en-US" sz="4000" b="1" dirty="0">
+              <a:rPr lang="en-US" sz="4000" dirty="0">
                 <a:solidFill>
                   <a:srgbClr val="111111"/>
                 </a:solidFill>
@@ -19825,27 +19931,7 @@
                 <a:ea typeface="Times New Roman" pitchFamily="34" charset="-122"/>
                 <a:cs typeface="Times New Roman" pitchFamily="34" charset="-120"/>
               </a:rPr>
-              <a:t>Our next lesson will be on:</a:t>
-            </a:r>
-            <a:endParaRPr lang="en-US" sz="4000" dirty="0"/>
-          </a:p>
-          <a:p>
-            <a:pPr algn="ctr" indent="0" marL="0">
-              <a:spcAft>
-                <a:spcPts val="800"/>
-              </a:spcAft>
-              <a:buNone/>
-            </a:pPr>
-            <a:r>
-              <a:rPr lang="en-US" sz="4000" b="1" dirty="0">
-                <a:solidFill>
-                  <a:srgbClr val="990011"/>
-                </a:solidFill>
-                <a:latin typeface="Times New Roman" pitchFamily="34" charset="0"/>
-                <a:ea typeface="Times New Roman" pitchFamily="34" charset="-122"/>
-                <a:cs typeface="Times New Roman" pitchFamily="34" charset="-120"/>
-              </a:rPr>
-              <a:t>Quantitative Techniques 3 (Part 3): Measures of Association: Spearman's Rank Correlation</a:t>
+              <a:t>Rank these values from highest to lowest: 12, 30, 25, 18.</a:t>
             </a:r>
             <a:endParaRPr lang="en-US" sz="4000" dirty="0"/>
           </a:p>
@@ -19957,6 +20043,245 @@
                 <a:ea typeface="Calibri" pitchFamily="34" charset="-122"/>
                 <a:cs typeface="Calibri" pitchFamily="34" charset="-120"/>
               </a:rPr>
+              <a:t>NEXT LESSON</a:t>
+            </a:r>
+            <a:endParaRPr lang="en-US" sz="1400" dirty="0"/>
+          </a:p>
+        </p:txBody>
+      </p:sp>
+      <p:pic>
+        <p:nvPicPr>
+          <p:cNvPr id="3" name="Image 0" descr="/home/claude/f4/img/minesec_sheet.png">    </p:cNvPr>
+          <p:cNvPicPr>
+            <a:picLocks noChangeAspect="1"/>
+          </p:cNvPicPr>
+          <p:nvPr/>
+        </p:nvPicPr>
+        <p:blipFill>
+          <a:blip r:embed="rId1"/>
+          <a:stretch>
+            <a:fillRect/>
+          </a:stretch>
+        </p:blipFill>
+        <p:spPr>
+          <a:xfrm>
+            <a:off x="0" y="658368"/>
+            <a:ext cx="5120640" cy="5833872"/>
+          </a:xfrm>
+          <a:prstGeom prst="rect">
+            <a:avLst/>
+          </a:prstGeom>
+        </p:spPr>
+      </p:pic>
+      <p:sp>
+        <p:nvSpPr>
+          <p:cNvPr id="4" name="Text 1"/>
+          <p:cNvSpPr/>
+          <p:nvPr/>
+        </p:nvSpPr>
+        <p:spPr>
+          <a:xfrm>
+            <a:off x="5349240" y="1005840"/>
+            <a:ext cx="6522415" cy="731520"/>
+          </a:xfrm>
+          <a:prstGeom prst="rect">
+            <a:avLst/>
+          </a:prstGeom>
+          <a:noFill/>
+          <a:ln/>
+        </p:spPr>
+        <p:txBody>
+          <a:bodyPr wrap="square" lIns="0" tIns="0" rIns="0" bIns="0" rtlCol="0" anchor="ctr">
+            <a:normAutofit/>
+          </a:bodyPr>
+          <a:lstStyle/>
+          <a:p>
+            <a:pPr algn="ctr" indent="0" marL="0">
+              <a:buNone/>
+            </a:pPr>
+            <a:r>
+              <a:rPr lang="en-US" sz="3600" b="1" dirty="0">
+                <a:solidFill>
+                  <a:srgbClr val="990011"/>
+                </a:solidFill>
+                <a:latin typeface="Times New Roman" pitchFamily="34" charset="0"/>
+                <a:ea typeface="Times New Roman" pitchFamily="34" charset="-122"/>
+                <a:cs typeface="Times New Roman" pitchFamily="34" charset="-120"/>
+              </a:rPr>
+              <a:t>Next Lesson</a:t>
+            </a:r>
+            <a:endParaRPr lang="en-US" sz="3600" dirty="0"/>
+          </a:p>
+        </p:txBody>
+      </p:sp>
+      <p:sp>
+        <p:nvSpPr>
+          <p:cNvPr id="5" name="Text 2"/>
+          <p:cNvSpPr/>
+          <p:nvPr/>
+        </p:nvSpPr>
+        <p:spPr>
+          <a:xfrm>
+            <a:off x="5349240" y="1783080"/>
+            <a:ext cx="6522415" cy="4663440"/>
+          </a:xfrm>
+          <a:prstGeom prst="rect">
+            <a:avLst/>
+          </a:prstGeom>
+          <a:noFill/>
+          <a:ln/>
+        </p:spPr>
+        <p:txBody>
+          <a:bodyPr wrap="square" lIns="0" tIns="0" rIns="0" bIns="0" rtlCol="0" anchor="ctr"/>
+          <a:lstStyle/>
+          <a:p>
+            <a:pPr algn="ctr" indent="0" marL="0">
+              <a:spcAft>
+                <a:spcPts val="800"/>
+              </a:spcAft>
+              <a:buNone/>
+            </a:pPr>
+            <a:r>
+              <a:rPr lang="en-US" sz="4000" b="1" dirty="0">
+                <a:solidFill>
+                  <a:srgbClr val="111111"/>
+                </a:solidFill>
+                <a:latin typeface="Times New Roman" pitchFamily="34" charset="0"/>
+                <a:ea typeface="Times New Roman" pitchFamily="34" charset="-122"/>
+                <a:cs typeface="Times New Roman" pitchFamily="34" charset="-120"/>
+              </a:rPr>
+              <a:t>Our next lesson will be on:</a:t>
+            </a:r>
+            <a:endParaRPr lang="en-US" sz="4000" dirty="0"/>
+          </a:p>
+          <a:p>
+            <a:pPr algn="ctr" indent="0" marL="0">
+              <a:spcAft>
+                <a:spcPts val="800"/>
+              </a:spcAft>
+              <a:buNone/>
+            </a:pPr>
+            <a:r>
+              <a:rPr lang="en-US" sz="4000" b="1" dirty="0">
+                <a:solidFill>
+                  <a:srgbClr val="990011"/>
+                </a:solidFill>
+                <a:latin typeface="Times New Roman" pitchFamily="34" charset="0"/>
+                <a:ea typeface="Times New Roman" pitchFamily="34" charset="-122"/>
+                <a:cs typeface="Times New Roman" pitchFamily="34" charset="-120"/>
+              </a:rPr>
+              <a:t>Quantitative Techniques 3 (Part 3): Measures of Association: Spearman's Rank Correlation</a:t>
+            </a:r>
+            <a:endParaRPr lang="en-US" sz="4000" dirty="0"/>
+          </a:p>
+        </p:txBody>
+      </p:sp>
+      <p:sp>
+        <p:nvSpPr>
+          <p:cNvPr id="25" name="Slide Number Placeholder 0"/>
+          <p:cNvSpPr>
+            <a:spLocks noGrp="1"/>
+          </p:cNvSpPr>
+          <p:nvPr>
+            <p:ph type="sldNum" sz="quarter" idx="4294967295"/>
+          </p:nvPr>
+        </p:nvSpPr>
+        <p:spPr>
+          <a:xfrm>
+            <a:off x="27432" y="91440"/>
+            <a:ext cx="585216" cy="475488"/>
+          </a:xfrm>
+          <a:prstGeom prst="rect">
+            <a:avLst/>
+          </a:prstGeom>
+          <a:extLst>
+            <a:ext uri="{C572A759-6A51-4108-AA02-DFA0A04FC94B}">
+              <ma14:wrappingTextBoxFlag xmlns:ma14="http://schemas.microsoft.com/office/mac/drawingml/2011/main" val="0"/>
+            </a:ext>
+          </a:extLst>
+        </p:spPr>
+        <p:txBody>
+          <a:bodyPr/>
+          <a:lstStyle>
+            <a:lvl1pPr>
+              <a:defRPr sz="2000">
+                <a:solidFill>
+                  <a:srgbClr val="FFFFFF"/>
+                </a:solidFill>
+                <a:latin typeface="Calibri"/>
+                <a:ea typeface="Calibri"/>
+                <a:cs typeface="Calibri"/>
+              </a:defRPr>
+            </a:lvl1pPr>
+          </a:lstStyle>
+          <a:p>
+            <a:pPr algn="ctr"/>
+            <a:fld id="{F7021451-1387-4CA6-816F-3879F97B5CBC}" type="slidenum">
+              <a:rPr b="1" lang="en-US"/>
+              <a:t>56</a:t>
+            </a:fld>
+            <a:endParaRPr lang="en-US"/>
+          </a:p>
+        </p:txBody>
+      </p:sp>
+    </p:spTree>
+  </p:cSld>
+  <p:clrMapOvr>
+    <a:masterClrMapping/>
+  </p:clrMapOvr>
+</p:sld>
+</file>
+
+<file path=ppt/slides/slide57.xml><?xml version="1.0" encoding="utf-8"?>
+<p:sld xmlns:a="http://schemas.openxmlformats.org/drawingml/2006/main" xmlns:r="http://schemas.openxmlformats.org/officeDocument/2006/relationships" xmlns:p="http://schemas.openxmlformats.org/presentationml/2006/main">
+  <p:cSld name="Slide 57">
+    <p:spTree>
+      <p:nvGrpSpPr>
+        <p:cNvPr id="1" name=""/>
+        <p:cNvGrpSpPr/>
+        <p:nvPr/>
+      </p:nvGrpSpPr>
+      <p:grpSpPr>
+        <a:xfrm>
+          <a:off x="0" y="0"/>
+          <a:ext cx="0" cy="0"/>
+          <a:chOff x="0" y="0"/>
+          <a:chExt cx="0" cy="0"/>
+        </a:xfrm>
+      </p:grpSpPr>
+      <p:sp>
+        <p:nvSpPr>
+          <p:cNvPr id="2" name="Text 0"/>
+          <p:cNvSpPr/>
+          <p:nvPr/>
+        </p:nvSpPr>
+        <p:spPr>
+          <a:xfrm>
+            <a:off x="457200" y="713232"/>
+            <a:ext cx="11368735" cy="274320"/>
+          </a:xfrm>
+          <a:prstGeom prst="rect">
+            <a:avLst/>
+          </a:prstGeom>
+          <a:noFill/>
+          <a:ln/>
+        </p:spPr>
+        <p:txBody>
+          <a:bodyPr wrap="square" lIns="0" tIns="0" rIns="0" bIns="0" rtlCol="0" anchor="ctr"/>
+          <a:lstStyle/>
+          <a:p>
+            <a:pPr algn="r" indent="0" marL="0">
+              <a:buNone/>
+            </a:pPr>
+            <a:r>
+              <a:rPr lang="en-US" sz="1400" b="1" dirty="0">
+                <a:solidFill>
+                  <a:srgbClr val="1C3F6E"/>
+                </a:solidFill>
+                <a:latin typeface="Calibri" pitchFamily="34" charset="0"/>
+                <a:ea typeface="Calibri" pitchFamily="34" charset="-122"/>
+                <a:cs typeface="Calibri" pitchFamily="34" charset="-120"/>
+              </a:rPr>
               <a:t>BILINGUAL GAME</a:t>
             </a:r>
             <a:endParaRPr lang="en-US" sz="1400" dirty="0"/>
@@ -20004,7 +20329,7 @@
       </p:sp>
       <p:graphicFrame>
         <p:nvGraphicFramePr>
-          <p:cNvPr id="57" name="Table 0"/>
+          <p:cNvPr id="58" name="Table 0"/>
           <p:cNvGraphicFramePr>
             <a:graphicFrameLocks noGrp="1"/>
           </p:cNvGraphicFramePr>
@@ -21040,7 +21365,7 @@
             <a:pPr algn="ctr"/>
             <a:fld id="{F7021451-1387-4CA6-816F-3879F97B5CBC}" type="slidenum">
               <a:rPr b="1" lang="en-US"/>
-              <a:t>56</a:t>
+              <a:t>57</a:t>
             </a:fld>
             <a:endParaRPr lang="en-US"/>
           </a:p>
@@ -21054,9 +21379,9 @@
 </p:sld>
 </file>
 
-<file path=ppt/slides/slide57.xml><?xml version="1.0" encoding="utf-8"?>
+<file path=ppt/slides/slide58.xml><?xml version="1.0" encoding="utf-8"?>
 <p:sld xmlns:a="http://schemas.openxmlformats.org/drawingml/2006/main" xmlns:r="http://schemas.openxmlformats.org/officeDocument/2006/relationships" xmlns:p="http://schemas.openxmlformats.org/presentationml/2006/main">
-  <p:cSld name="Slide 57">
+  <p:cSld name="Slide 58">
     <p:spTree>
       <p:nvGrpSpPr>
         <p:cNvPr id="1" name=""/>
@@ -21151,7 +21476,7 @@
       </p:sp>
       <p:graphicFrame>
         <p:nvGraphicFramePr>
-          <p:cNvPr id="58" name="Table 0"/>
+          <p:cNvPr id="59" name="Table 0"/>
           <p:cNvGraphicFramePr>
             <a:graphicFrameLocks noGrp="1"/>
           </p:cNvGraphicFramePr>
@@ -21773,7 +22098,7 @@
             <a:pPr algn="ctr"/>
             <a:fld id="{F7021451-1387-4CA6-816F-3879F97B5CBC}" type="slidenum">
               <a:rPr b="1" lang="en-US"/>
-              <a:t>57</a:t>
+              <a:t>58</a:t>
             </a:fld>
             <a:endParaRPr lang="en-US"/>
           </a:p>
@@ -21787,9 +22112,9 @@
 </p:sld>
 </file>
 
-<file path=ppt/slides/slide58.xml><?xml version="1.0" encoding="utf-8"?>
+<file path=ppt/slides/slide59.xml><?xml version="1.0" encoding="utf-8"?>
 <p:sld xmlns:a="http://schemas.openxmlformats.org/drawingml/2006/main" xmlns:r="http://schemas.openxmlformats.org/officeDocument/2006/relationships" xmlns:p="http://schemas.openxmlformats.org/presentationml/2006/main">
-  <p:cSld name="Slide 58">
+  <p:cSld name="Slide 59">
     <p:spTree>
       <p:nvGrpSpPr>
         <p:cNvPr id="1" name=""/>
@@ -21884,7 +22209,7 @@
       </p:sp>
       <p:graphicFrame>
         <p:nvGraphicFramePr>
-          <p:cNvPr id="59" name="Table 0"/>
+          <p:cNvPr id="60" name="Table 0"/>
           <p:cNvGraphicFramePr>
             <a:graphicFrameLocks noGrp="1"/>
           </p:cNvGraphicFramePr>
@@ -22644,331 +22969,6 @@
             <a:pPr algn="ctr"/>
             <a:fld id="{F7021451-1387-4CA6-816F-3879F97B5CBC}" type="slidenum">
               <a:rPr b="1" lang="en-US"/>
-              <a:t>58</a:t>
-            </a:fld>
-            <a:endParaRPr lang="en-US"/>
-          </a:p>
-        </p:txBody>
-      </p:sp>
-    </p:spTree>
-  </p:cSld>
-  <p:clrMapOvr>
-    <a:masterClrMapping/>
-  </p:clrMapOvr>
-</p:sld>
-</file>
-
-<file path=ppt/slides/slide59.xml><?xml version="1.0" encoding="utf-8"?>
-<p:sld xmlns:a="http://schemas.openxmlformats.org/drawingml/2006/main" xmlns:r="http://schemas.openxmlformats.org/officeDocument/2006/relationships" xmlns:p="http://schemas.openxmlformats.org/presentationml/2006/main">
-  <p:cSld name="Slide 59">
-    <p:spTree>
-      <p:nvGrpSpPr>
-        <p:cNvPr id="1" name=""/>
-        <p:cNvGrpSpPr/>
-        <p:nvPr/>
-      </p:nvGrpSpPr>
-      <p:grpSpPr>
-        <a:xfrm>
-          <a:off x="0" y="0"/>
-          <a:ext cx="0" cy="0"/>
-          <a:chOff x="0" y="0"/>
-          <a:chExt cx="0" cy="0"/>
-        </a:xfrm>
-      </p:grpSpPr>
-      <p:sp>
-        <p:nvSpPr>
-          <p:cNvPr id="2" name="Text 0"/>
-          <p:cNvSpPr/>
-          <p:nvPr/>
-        </p:nvSpPr>
-        <p:spPr>
-          <a:xfrm>
-            <a:off x="457200" y="713232"/>
-            <a:ext cx="11368735" cy="274320"/>
-          </a:xfrm>
-          <a:prstGeom prst="rect">
-            <a:avLst/>
-          </a:prstGeom>
-          <a:noFill/>
-          <a:ln/>
-        </p:spPr>
-        <p:txBody>
-          <a:bodyPr wrap="square" lIns="0" tIns="0" rIns="0" bIns="0" rtlCol="0" anchor="ctr"/>
-          <a:lstStyle/>
-          <a:p>
-            <a:pPr algn="r" indent="0" marL="0">
-              <a:buNone/>
-            </a:pPr>
-            <a:r>
-              <a:rPr lang="en-US" sz="1400" b="1" dirty="0">
-                <a:solidFill>
-                  <a:srgbClr val="1C3F6E"/>
-                </a:solidFill>
-                <a:latin typeface="Calibri" pitchFamily="34" charset="0"/>
-                <a:ea typeface="Calibri" pitchFamily="34" charset="-122"/>
-                <a:cs typeface="Calibri" pitchFamily="34" charset="-120"/>
-              </a:rPr>
-              <a:t>TEACHER'S NOTE</a:t>
-            </a:r>
-            <a:endParaRPr lang="en-US" sz="1400" dirty="0"/>
-          </a:p>
-        </p:txBody>
-      </p:sp>
-      <p:pic>
-        <p:nvPicPr>
-          <p:cNvPr id="3" name="Image 0" descr="/home/claude/f4/img/minesec_sheet.png">    </p:cNvPr>
-          <p:cNvPicPr>
-            <a:picLocks noChangeAspect="1"/>
-          </p:cNvPicPr>
-          <p:nvPr/>
-        </p:nvPicPr>
-        <p:blipFill>
-          <a:blip r:embed="rId1"/>
-          <a:stretch>
-            <a:fillRect/>
-          </a:stretch>
-        </p:blipFill>
-        <p:spPr>
-          <a:xfrm>
-            <a:off x="0" y="658368"/>
-            <a:ext cx="3840480" cy="5833872"/>
-          </a:xfrm>
-          <a:prstGeom prst="rect">
-            <a:avLst/>
-          </a:prstGeom>
-        </p:spPr>
-      </p:pic>
-      <p:sp>
-        <p:nvSpPr>
-          <p:cNvPr id="4" name="Text 1"/>
-          <p:cNvSpPr/>
-          <p:nvPr/>
-        </p:nvSpPr>
-        <p:spPr>
-          <a:xfrm>
-            <a:off x="4069080" y="1005840"/>
-            <a:ext cx="7802575" cy="731520"/>
-          </a:xfrm>
-          <a:prstGeom prst="rect">
-            <a:avLst/>
-          </a:prstGeom>
-          <a:noFill/>
-          <a:ln/>
-        </p:spPr>
-        <p:txBody>
-          <a:bodyPr wrap="square" lIns="0" tIns="0" rIns="0" bIns="0" rtlCol="0" anchor="ctr">
-            <a:normAutofit/>
-          </a:bodyPr>
-          <a:lstStyle/>
-          <a:p>
-            <a:pPr algn="ctr" indent="0" marL="0">
-              <a:buNone/>
-            </a:pPr>
-            <a:r>
-              <a:rPr lang="en-US" sz="3600" b="1" dirty="0">
-                <a:solidFill>
-                  <a:srgbClr val="990011"/>
-                </a:solidFill>
-                <a:latin typeface="Times New Roman" pitchFamily="34" charset="0"/>
-                <a:ea typeface="Times New Roman" pitchFamily="34" charset="-122"/>
-                <a:cs typeface="Times New Roman" pitchFamily="34" charset="-120"/>
-              </a:rPr>
-              <a:t>Teacher's Note</a:t>
-            </a:r>
-            <a:endParaRPr lang="en-US" sz="3600" dirty="0"/>
-          </a:p>
-        </p:txBody>
-      </p:sp>
-      <p:sp>
-        <p:nvSpPr>
-          <p:cNvPr id="5" name="Text 2"/>
-          <p:cNvSpPr/>
-          <p:nvPr/>
-        </p:nvSpPr>
-        <p:spPr>
-          <a:xfrm>
-            <a:off x="4069080" y="1783080"/>
-            <a:ext cx="7802575" cy="4663440"/>
-          </a:xfrm>
-          <a:prstGeom prst="rect">
-            <a:avLst/>
-          </a:prstGeom>
-          <a:noFill/>
-          <a:ln/>
-        </p:spPr>
-        <p:txBody>
-          <a:bodyPr wrap="square" lIns="0" tIns="0" rIns="0" bIns="0" rtlCol="0" anchor="t"/>
-          <a:lstStyle/>
-          <a:p>
-            <a:pPr algn="l" marL="342900" indent="-342900">
-              <a:spcAft>
-                <a:spcPts val="800"/>
-              </a:spcAft>
-              <a:buSzPct val="100000"/>
-              <a:buChar char="•"/>
-            </a:pPr>
-            <a:r>
-              <a:rPr lang="en-US" sz="2000" dirty="0">
-                <a:solidFill>
-                  <a:srgbClr val="111111"/>
-                </a:solidFill>
-                <a:latin typeface="Calibri" pitchFamily="34" charset="0"/>
-                <a:ea typeface="Calibri" pitchFamily="34" charset="-122"/>
-                <a:cs typeface="Calibri" pitchFamily="34" charset="-120"/>
-              </a:rPr>
-              <a:t>Timing: Homework correction, plan, objectives 8 min | Recall, situation, action 10 min | 5 activities 30 min | Board summary (copying) 30 min | Evaluation, remediation 10 min | Homework, next lesson 5 min | Logbook 7 min</a:t>
-            </a:r>
-            <a:endParaRPr lang="en-US" sz="2000" dirty="0"/>
-          </a:p>
-          <a:p>
-            <a:pPr algn="l" marL="342900" indent="-342900">
-              <a:spcAft>
-                <a:spcPts val="800"/>
-              </a:spcAft>
-              <a:buSzPct val="100000"/>
-              <a:buChar char="•"/>
-            </a:pPr>
-            <a:r>
-              <a:rPr lang="en-US" sz="2000" dirty="0">
-                <a:solidFill>
-                  <a:srgbClr val="111111"/>
-                </a:solidFill>
-                <a:latin typeface="Calibri" pitchFamily="34" charset="0"/>
-                <a:ea typeface="Calibri" pitchFamily="34" charset="-122"/>
-                <a:cs typeface="Calibri" pitchFamily="34" charset="-120"/>
-              </a:rPr>
-              <a:t>Without the projector (Activity 1): write the steps on the board.</a:t>
-            </a:r>
-            <a:endParaRPr lang="en-US" sz="2000" dirty="0"/>
-          </a:p>
-          <a:p>
-            <a:pPr algn="l" marL="342900" indent="-342900">
-              <a:spcAft>
-                <a:spcPts val="800"/>
-              </a:spcAft>
-              <a:buSzPct val="100000"/>
-              <a:buChar char="•"/>
-            </a:pPr>
-            <a:r>
-              <a:rPr lang="en-US" sz="2000" dirty="0">
-                <a:solidFill>
-                  <a:srgbClr val="111111"/>
-                </a:solidFill>
-                <a:latin typeface="Calibri" pitchFamily="34" charset="0"/>
-                <a:ea typeface="Calibri" pitchFamily="34" charset="-122"/>
-                <a:cs typeface="Calibri" pitchFamily="34" charset="-120"/>
-              </a:rPr>
-              <a:t>Without the projector (Activity 2): use a calculator for the square root.</a:t>
-            </a:r>
-            <a:endParaRPr lang="en-US" sz="2000" dirty="0"/>
-          </a:p>
-          <a:p>
-            <a:pPr algn="l" marL="342900" indent="-342900">
-              <a:spcAft>
-                <a:spcPts val="800"/>
-              </a:spcAft>
-              <a:buSzPct val="100000"/>
-              <a:buChar char="•"/>
-            </a:pPr>
-            <a:r>
-              <a:rPr lang="en-US" sz="2000" dirty="0">
-                <a:solidFill>
-                  <a:srgbClr val="111111"/>
-                </a:solidFill>
-                <a:latin typeface="Calibri" pitchFamily="34" charset="0"/>
-                <a:ea typeface="Calibri" pitchFamily="34" charset="-122"/>
-                <a:cs typeface="Calibri" pitchFamily="34" charset="-120"/>
-              </a:rPr>
-              <a:t>Without the projector (Activity 3): add the deviations without squaring.</a:t>
-            </a:r>
-            <a:endParaRPr lang="en-US" sz="2000" dirty="0"/>
-          </a:p>
-          <a:p>
-            <a:pPr algn="l" marL="342900" indent="-342900">
-              <a:spcAft>
-                <a:spcPts val="800"/>
-              </a:spcAft>
-              <a:buSzPct val="100000"/>
-              <a:buChar char="•"/>
-            </a:pPr>
-            <a:r>
-              <a:rPr lang="en-US" sz="2000" dirty="0">
-                <a:solidFill>
-                  <a:srgbClr val="111111"/>
-                </a:solidFill>
-                <a:latin typeface="Calibri" pitchFamily="34" charset="0"/>
-                <a:ea typeface="Calibri" pitchFamily="34" charset="-122"/>
-                <a:cs typeface="Calibri" pitchFamily="34" charset="-120"/>
-              </a:rPr>
-              <a:t>Without the projector (Activity 4): calculate on the board.</a:t>
-            </a:r>
-            <a:endParaRPr lang="en-US" sz="2000" dirty="0"/>
-          </a:p>
-          <a:p>
-            <a:pPr algn="l" marL="342900" indent="-342900">
-              <a:spcAft>
-                <a:spcPts val="800"/>
-              </a:spcAft>
-              <a:buSzPct val="100000"/>
-              <a:buChar char="•"/>
-            </a:pPr>
-            <a:r>
-              <a:rPr lang="en-US" sz="2000" dirty="0">
-                <a:solidFill>
-                  <a:srgbClr val="111111"/>
-                </a:solidFill>
-                <a:latin typeface="Calibri" pitchFamily="34" charset="0"/>
-                <a:ea typeface="Calibri" pitchFamily="34" charset="-122"/>
-                <a:cs typeface="Calibri" pitchFamily="34" charset="-120"/>
-              </a:rPr>
-              <a:t>Without the projector (Activity 5): read the rainfall bars.</a:t>
-            </a:r>
-            <a:endParaRPr lang="en-US" sz="2000" dirty="0"/>
-          </a:p>
-        </p:txBody>
-      </p:sp>
-      <p:sp>
-        <p:nvSpPr>
-          <p:cNvPr id="25" name="Slide Number Placeholder 0"/>
-          <p:cNvSpPr>
-            <a:spLocks noGrp="1"/>
-          </p:cNvSpPr>
-          <p:nvPr>
-            <p:ph type="sldNum" sz="quarter" idx="4294967295"/>
-          </p:nvPr>
-        </p:nvSpPr>
-        <p:spPr>
-          <a:xfrm>
-            <a:off x="27432" y="91440"/>
-            <a:ext cx="585216" cy="475488"/>
-          </a:xfrm>
-          <a:prstGeom prst="rect">
-            <a:avLst/>
-          </a:prstGeom>
-          <a:extLst>
-            <a:ext uri="{C572A759-6A51-4108-AA02-DFA0A04FC94B}">
-              <ma14:wrappingTextBoxFlag xmlns:ma14="http://schemas.microsoft.com/office/mac/drawingml/2011/main" val="0"/>
-            </a:ext>
-          </a:extLst>
-        </p:spPr>
-        <p:txBody>
-          <a:bodyPr/>
-          <a:lstStyle>
-            <a:lvl1pPr>
-              <a:defRPr sz="2000">
-                <a:solidFill>
-                  <a:srgbClr val="FFFFFF"/>
-                </a:solidFill>
-                <a:latin typeface="Calibri"/>
-                <a:ea typeface="Calibri"/>
-                <a:cs typeface="Calibri"/>
-              </a:defRPr>
-            </a:lvl1pPr>
-          </a:lstStyle>
-          <a:p>
-            <a:pPr algn="ctr"/>
-            <a:fld id="{F7021451-1387-4CA6-816F-3879F97B5CBC}" type="slidenum">
-              <a:rPr b="1" lang="en-US"/>
               <a:t>59</a:t>
             </a:fld>
             <a:endParaRPr lang="en-US"/>
@@ -23364,7 +23364,7 @@
                 <a:ea typeface="Calibri" pitchFamily="34" charset="-122"/>
                 <a:cs typeface="Calibri" pitchFamily="34" charset="-120"/>
               </a:rPr>
-              <a:t>REFERENCES</a:t>
+              <a:t>TEACHER'S NOTE</a:t>
             </a:r>
             <a:endParaRPr lang="en-US" sz="1400" dirty="0"/>
           </a:p>
@@ -23387,7 +23387,7 @@
         <p:spPr>
           <a:xfrm>
             <a:off x="0" y="658368"/>
-            <a:ext cx="5120640" cy="5833872"/>
+            <a:ext cx="3840480" cy="5833872"/>
           </a:xfrm>
           <a:prstGeom prst="rect">
             <a:avLst/>
@@ -23402,8 +23402,8 @@
         </p:nvSpPr>
         <p:spPr>
           <a:xfrm>
-            <a:off x="5349240" y="1005840"/>
-            <a:ext cx="6522415" cy="731520"/>
+            <a:off x="4069080" y="1005840"/>
+            <a:ext cx="7802575" cy="731520"/>
           </a:xfrm>
           <a:prstGeom prst="rect">
             <a:avLst/>
@@ -23429,7 +23429,7 @@
                 <a:ea typeface="Times New Roman" pitchFamily="34" charset="-122"/>
                 <a:cs typeface="Times New Roman" pitchFamily="34" charset="-120"/>
               </a:rPr>
-              <a:t>References</a:t>
+              <a:t>Teacher's Note</a:t>
             </a:r>
             <a:endParaRPr lang="en-US" sz="3600" dirty="0"/>
           </a:p>
@@ -23443,8 +23443,8 @@
         </p:nvSpPr>
         <p:spPr>
           <a:xfrm>
-            <a:off x="5349240" y="1783080"/>
-            <a:ext cx="6522415" cy="4663440"/>
+            <a:off x="4069080" y="1783080"/>
+            <a:ext cx="7802575" cy="4663440"/>
           </a:xfrm>
           <a:prstGeom prst="rect">
             <a:avLst/>
@@ -23464,7 +23464,7 @@
               <a:buChar char="•"/>
             </a:pPr>
             <a:r>
-              <a:rPr lang="en-US" sz="1800" dirty="0">
+              <a:rPr lang="en-US" sz="2000" dirty="0">
                 <a:solidFill>
                   <a:srgbClr val="111111"/>
                 </a:solidFill>
@@ -23472,9 +23472,9 @@
                 <a:ea typeface="Calibri" pitchFamily="34" charset="-122"/>
                 <a:cs typeface="Calibri" pitchFamily="34" charset="-120"/>
               </a:rPr>
-              <a:t>Geography Syllabus for Sixth Forms (Lower and Upper Sixth), MINESEC, 2019 — Module 8 (Practical Geography).</a:t>
-            </a:r>
-            <a:endParaRPr lang="en-US" sz="1800" dirty="0"/>
+              <a:t>Timing: Homework correction, plan, objectives 8 min | Recall, situation, action 10 min | 5 activities 30 min | Board summary (copying) 30 min | Evaluation, remediation 10 min | Homework, next lesson 5 min | Logbook 7 min</a:t>
+            </a:r>
+            <a:endParaRPr lang="en-US" sz="2000" dirty="0"/>
           </a:p>
           <a:p>
             <a:pPr algn="l" marL="342900" indent="-342900">
@@ -23485,7 +23485,7 @@
               <a:buChar char="•"/>
             </a:pPr>
             <a:r>
-              <a:rPr lang="en-US" sz="1800" dirty="0">
+              <a:rPr lang="en-US" sz="2000" dirty="0">
                 <a:solidFill>
                   <a:srgbClr val="111111"/>
                 </a:solidFill>
@@ -23493,9 +23493,9 @@
                 <a:ea typeface="Calibri" pitchFamily="34" charset="-122"/>
                 <a:cs typeface="Calibri" pitchFamily="34" charset="-120"/>
               </a:rPr>
-              <a:t>Teacher's course notes: Mr KAMDEM E., Statistical Techniques in Geographical Analysis (USA), GBHS Garoua, 2026.</a:t>
-            </a:r>
-            <a:endParaRPr lang="en-US" sz="1800" dirty="0"/>
+              <a:t>Without the projector (Activity 1): write the steps on the board.</a:t>
+            </a:r>
+            <a:endParaRPr lang="en-US" sz="2000" dirty="0"/>
           </a:p>
           <a:p>
             <a:pPr algn="l" marL="342900" indent="-342900">
@@ -23506,7 +23506,7 @@
               <a:buChar char="•"/>
             </a:pPr>
             <a:r>
-              <a:rPr lang="en-US" sz="1800" dirty="0">
+              <a:rPr lang="en-US" sz="2000" dirty="0">
                 <a:solidFill>
                   <a:srgbClr val="111111"/>
                 </a:solidFill>
@@ -23514,9 +23514,72 @@
                 <a:ea typeface="Calibri" pitchFamily="34" charset="-122"/>
                 <a:cs typeface="Calibri" pitchFamily="34" charset="-120"/>
               </a:rPr>
-              <a:t>Diagrams and animations: drawn for this lesson (Geography Department).</a:t>
-            </a:r>
-            <a:endParaRPr lang="en-US" sz="1800" dirty="0"/>
+              <a:t>Without the projector (Activity 2): use a calculator for the square root.</a:t>
+            </a:r>
+            <a:endParaRPr lang="en-US" sz="2000" dirty="0"/>
+          </a:p>
+          <a:p>
+            <a:pPr algn="l" marL="342900" indent="-342900">
+              <a:spcAft>
+                <a:spcPts val="800"/>
+              </a:spcAft>
+              <a:buSzPct val="100000"/>
+              <a:buChar char="•"/>
+            </a:pPr>
+            <a:r>
+              <a:rPr lang="en-US" sz="2000" dirty="0">
+                <a:solidFill>
+                  <a:srgbClr val="111111"/>
+                </a:solidFill>
+                <a:latin typeface="Calibri" pitchFamily="34" charset="0"/>
+                <a:ea typeface="Calibri" pitchFamily="34" charset="-122"/>
+                <a:cs typeface="Calibri" pitchFamily="34" charset="-120"/>
+              </a:rPr>
+              <a:t>Without the projector (Activity 3): add the deviations without squaring.</a:t>
+            </a:r>
+            <a:endParaRPr lang="en-US" sz="2000" dirty="0"/>
+          </a:p>
+          <a:p>
+            <a:pPr algn="l" marL="342900" indent="-342900">
+              <a:spcAft>
+                <a:spcPts val="800"/>
+              </a:spcAft>
+              <a:buSzPct val="100000"/>
+              <a:buChar char="•"/>
+            </a:pPr>
+            <a:r>
+              <a:rPr lang="en-US" sz="2000" dirty="0">
+                <a:solidFill>
+                  <a:srgbClr val="111111"/>
+                </a:solidFill>
+                <a:latin typeface="Calibri" pitchFamily="34" charset="0"/>
+                <a:ea typeface="Calibri" pitchFamily="34" charset="-122"/>
+                <a:cs typeface="Calibri" pitchFamily="34" charset="-120"/>
+              </a:rPr>
+              <a:t>Without the projector (Activity 4): calculate on the board.</a:t>
+            </a:r>
+            <a:endParaRPr lang="en-US" sz="2000" dirty="0"/>
+          </a:p>
+          <a:p>
+            <a:pPr algn="l" marL="342900" indent="-342900">
+              <a:spcAft>
+                <a:spcPts val="800"/>
+              </a:spcAft>
+              <a:buSzPct val="100000"/>
+              <a:buChar char="•"/>
+            </a:pPr>
+            <a:r>
+              <a:rPr lang="en-US" sz="2000" dirty="0">
+                <a:solidFill>
+                  <a:srgbClr val="111111"/>
+                </a:solidFill>
+                <a:latin typeface="Calibri" pitchFamily="34" charset="0"/>
+                <a:ea typeface="Calibri" pitchFamily="34" charset="-122"/>
+                <a:cs typeface="Calibri" pitchFamily="34" charset="-120"/>
+              </a:rPr>
+              <a:t>Without the projector (Activity 5): read the rainfall bars.</a:t>
+            </a:r>
+            <a:endParaRPr lang="en-US" sz="2000" dirty="0"/>
           </a:p>
         </p:txBody>
       </p:sp>
@@ -23563,6 +23626,268 @@
             <a:fld id="{F7021451-1387-4CA6-816F-3879F97B5CBC}" type="slidenum">
               <a:rPr b="1" lang="en-US"/>
               <a:t>60</a:t>
+            </a:fld>
+            <a:endParaRPr lang="en-US"/>
+          </a:p>
+        </p:txBody>
+      </p:sp>
+    </p:spTree>
+  </p:cSld>
+  <p:clrMapOvr>
+    <a:masterClrMapping/>
+  </p:clrMapOvr>
+</p:sld>
+</file>
+
+<file path=ppt/slides/slide61.xml><?xml version="1.0" encoding="utf-8"?>
+<p:sld xmlns:a="http://schemas.openxmlformats.org/drawingml/2006/main" xmlns:r="http://schemas.openxmlformats.org/officeDocument/2006/relationships" xmlns:p="http://schemas.openxmlformats.org/presentationml/2006/main">
+  <p:cSld name="Slide 61">
+    <p:spTree>
+      <p:nvGrpSpPr>
+        <p:cNvPr id="1" name=""/>
+        <p:cNvGrpSpPr/>
+        <p:nvPr/>
+      </p:nvGrpSpPr>
+      <p:grpSpPr>
+        <a:xfrm>
+          <a:off x="0" y="0"/>
+          <a:ext cx="0" cy="0"/>
+          <a:chOff x="0" y="0"/>
+          <a:chExt cx="0" cy="0"/>
+        </a:xfrm>
+      </p:grpSpPr>
+      <p:sp>
+        <p:nvSpPr>
+          <p:cNvPr id="2" name="Text 0"/>
+          <p:cNvSpPr/>
+          <p:nvPr/>
+        </p:nvSpPr>
+        <p:spPr>
+          <a:xfrm>
+            <a:off x="457200" y="713232"/>
+            <a:ext cx="11368735" cy="274320"/>
+          </a:xfrm>
+          <a:prstGeom prst="rect">
+            <a:avLst/>
+          </a:prstGeom>
+          <a:noFill/>
+          <a:ln/>
+        </p:spPr>
+        <p:txBody>
+          <a:bodyPr wrap="square" lIns="0" tIns="0" rIns="0" bIns="0" rtlCol="0" anchor="ctr"/>
+          <a:lstStyle/>
+          <a:p>
+            <a:pPr algn="r" indent="0" marL="0">
+              <a:buNone/>
+            </a:pPr>
+            <a:r>
+              <a:rPr lang="en-US" sz="1400" b="1" dirty="0">
+                <a:solidFill>
+                  <a:srgbClr val="1C3F6E"/>
+                </a:solidFill>
+                <a:latin typeface="Calibri" pitchFamily="34" charset="0"/>
+                <a:ea typeface="Calibri" pitchFamily="34" charset="-122"/>
+                <a:cs typeface="Calibri" pitchFamily="34" charset="-120"/>
+              </a:rPr>
+              <a:t>REFERENCES</a:t>
+            </a:r>
+            <a:endParaRPr lang="en-US" sz="1400" dirty="0"/>
+          </a:p>
+        </p:txBody>
+      </p:sp>
+      <p:pic>
+        <p:nvPicPr>
+          <p:cNvPr id="3" name="Image 0" descr="/home/claude/f4/img/minesec_sheet.png">    </p:cNvPr>
+          <p:cNvPicPr>
+            <a:picLocks noChangeAspect="1"/>
+          </p:cNvPicPr>
+          <p:nvPr/>
+        </p:nvPicPr>
+        <p:blipFill>
+          <a:blip r:embed="rId1"/>
+          <a:stretch>
+            <a:fillRect/>
+          </a:stretch>
+        </p:blipFill>
+        <p:spPr>
+          <a:xfrm>
+            <a:off x="0" y="658368"/>
+            <a:ext cx="5120640" cy="5833872"/>
+          </a:xfrm>
+          <a:prstGeom prst="rect">
+            <a:avLst/>
+          </a:prstGeom>
+        </p:spPr>
+      </p:pic>
+      <p:sp>
+        <p:nvSpPr>
+          <p:cNvPr id="4" name="Text 1"/>
+          <p:cNvSpPr/>
+          <p:nvPr/>
+        </p:nvSpPr>
+        <p:spPr>
+          <a:xfrm>
+            <a:off x="5349240" y="1005840"/>
+            <a:ext cx="6522415" cy="731520"/>
+          </a:xfrm>
+          <a:prstGeom prst="rect">
+            <a:avLst/>
+          </a:prstGeom>
+          <a:noFill/>
+          <a:ln/>
+        </p:spPr>
+        <p:txBody>
+          <a:bodyPr wrap="square" lIns="0" tIns="0" rIns="0" bIns="0" rtlCol="0" anchor="ctr">
+            <a:normAutofit/>
+          </a:bodyPr>
+          <a:lstStyle/>
+          <a:p>
+            <a:pPr algn="ctr" indent="0" marL="0">
+              <a:buNone/>
+            </a:pPr>
+            <a:r>
+              <a:rPr lang="en-US" sz="3600" b="1" dirty="0">
+                <a:solidFill>
+                  <a:srgbClr val="990011"/>
+                </a:solidFill>
+                <a:latin typeface="Times New Roman" pitchFamily="34" charset="0"/>
+                <a:ea typeface="Times New Roman" pitchFamily="34" charset="-122"/>
+                <a:cs typeface="Times New Roman" pitchFamily="34" charset="-120"/>
+              </a:rPr>
+              <a:t>References</a:t>
+            </a:r>
+            <a:endParaRPr lang="en-US" sz="3600" dirty="0"/>
+          </a:p>
+        </p:txBody>
+      </p:sp>
+      <p:sp>
+        <p:nvSpPr>
+          <p:cNvPr id="5" name="Text 2"/>
+          <p:cNvSpPr/>
+          <p:nvPr/>
+        </p:nvSpPr>
+        <p:spPr>
+          <a:xfrm>
+            <a:off x="5349240" y="1783080"/>
+            <a:ext cx="6522415" cy="4663440"/>
+          </a:xfrm>
+          <a:prstGeom prst="rect">
+            <a:avLst/>
+          </a:prstGeom>
+          <a:noFill/>
+          <a:ln/>
+        </p:spPr>
+        <p:txBody>
+          <a:bodyPr wrap="square" lIns="0" tIns="0" rIns="0" bIns="0" rtlCol="0" anchor="t"/>
+          <a:lstStyle/>
+          <a:p>
+            <a:pPr algn="l" marL="342900" indent="-342900">
+              <a:spcAft>
+                <a:spcPts val="800"/>
+              </a:spcAft>
+              <a:buSzPct val="100000"/>
+              <a:buChar char="•"/>
+            </a:pPr>
+            <a:r>
+              <a:rPr lang="en-US" sz="1800" dirty="0">
+                <a:solidFill>
+                  <a:srgbClr val="111111"/>
+                </a:solidFill>
+                <a:latin typeface="Calibri" pitchFamily="34" charset="0"/>
+                <a:ea typeface="Calibri" pitchFamily="34" charset="-122"/>
+                <a:cs typeface="Calibri" pitchFamily="34" charset="-120"/>
+              </a:rPr>
+              <a:t>Geography Syllabus for Sixth Forms (Lower and Upper Sixth), MINESEC, 2019 — Module 8 (Practical Geography).</a:t>
+            </a:r>
+            <a:endParaRPr lang="en-US" sz="1800" dirty="0"/>
+          </a:p>
+          <a:p>
+            <a:pPr algn="l" marL="342900" indent="-342900">
+              <a:spcAft>
+                <a:spcPts val="800"/>
+              </a:spcAft>
+              <a:buSzPct val="100000"/>
+              <a:buChar char="•"/>
+            </a:pPr>
+            <a:r>
+              <a:rPr lang="en-US" sz="1800" dirty="0">
+                <a:solidFill>
+                  <a:srgbClr val="111111"/>
+                </a:solidFill>
+                <a:latin typeface="Calibri" pitchFamily="34" charset="0"/>
+                <a:ea typeface="Calibri" pitchFamily="34" charset="-122"/>
+                <a:cs typeface="Calibri" pitchFamily="34" charset="-120"/>
+              </a:rPr>
+              <a:t>Teacher's course notes: Mr KAMDEM E., Statistical Techniques in Geographical Analysis (USA), GBHS Garoua, 2026.</a:t>
+            </a:r>
+            <a:endParaRPr lang="en-US" sz="1800" dirty="0"/>
+          </a:p>
+          <a:p>
+            <a:pPr algn="l" marL="342900" indent="-342900">
+              <a:spcAft>
+                <a:spcPts val="800"/>
+              </a:spcAft>
+              <a:buSzPct val="100000"/>
+              <a:buChar char="•"/>
+            </a:pPr>
+            <a:r>
+              <a:rPr lang="en-US" sz="1800" dirty="0">
+                <a:solidFill>
+                  <a:srgbClr val="111111"/>
+                </a:solidFill>
+                <a:latin typeface="Calibri" pitchFamily="34" charset="0"/>
+                <a:ea typeface="Calibri" pitchFamily="34" charset="-122"/>
+                <a:cs typeface="Calibri" pitchFamily="34" charset="-120"/>
+              </a:rPr>
+              <a:t>Diagrams and animations: drawn for this lesson (Geography Department).</a:t>
+            </a:r>
+            <a:endParaRPr lang="en-US" sz="1800" dirty="0"/>
+          </a:p>
+        </p:txBody>
+      </p:sp>
+      <p:sp>
+        <p:nvSpPr>
+          <p:cNvPr id="25" name="Slide Number Placeholder 0"/>
+          <p:cNvSpPr>
+            <a:spLocks noGrp="1"/>
+          </p:cNvSpPr>
+          <p:nvPr>
+            <p:ph type="sldNum" sz="quarter" idx="4294967295"/>
+          </p:nvPr>
+        </p:nvSpPr>
+        <p:spPr>
+          <a:xfrm>
+            <a:off x="27432" y="91440"/>
+            <a:ext cx="585216" cy="475488"/>
+          </a:xfrm>
+          <a:prstGeom prst="rect">
+            <a:avLst/>
+          </a:prstGeom>
+          <a:extLst>
+            <a:ext uri="{C572A759-6A51-4108-AA02-DFA0A04FC94B}">
+              <ma14:wrappingTextBoxFlag xmlns:ma14="http://schemas.microsoft.com/office/mac/drawingml/2011/main" val="0"/>
+            </a:ext>
+          </a:extLst>
+        </p:spPr>
+        <p:txBody>
+          <a:bodyPr/>
+          <a:lstStyle>
+            <a:lvl1pPr>
+              <a:defRPr sz="2000">
+                <a:solidFill>
+                  <a:srgbClr val="FFFFFF"/>
+                </a:solidFill>
+                <a:latin typeface="Calibri"/>
+                <a:ea typeface="Calibri"/>
+                <a:cs typeface="Calibri"/>
+              </a:defRPr>
+            </a:lvl1pPr>
+          </a:lstStyle>
+          <a:p>
+            <a:pPr algn="ctr"/>
+            <a:fld id="{F7021451-1387-4CA6-816F-3879F97B5CBC}" type="slidenum">
+              <a:rPr b="1" lang="en-US"/>
+              <a:t>61</a:t>
             </a:fld>
             <a:endParaRPr lang="en-US"/>
           </a:p>
